--- a/docs/pptx/entire/ritu-entire-linsubhr-disc-sideeffect.pptx
+++ b/docs/pptx/entire/ritu-entire-linsubhr-disc-sideeffect.pptx
@@ -3045,612 +3045,612 @@
           </p:nvSpPr>
           <p:spPr>
             <a:xfrm>
-              <a:off x="1172049" y="3013193"/>
-              <a:ext cx="7090630" cy="2063939"/>
+              <a:off x="1172049" y="2995696"/>
+              <a:ext cx="7090630" cy="2083039"/>
             </a:xfrm>
             <a:custGeom>
               <a:avLst/>
               <a:pathLst>
-                <a:path w="7090630" h="2063939">
+                <a:path w="7090630" h="2083039">
                   <a:moveTo>
                     <a:pt x="0" y="0"/>
                   </a:moveTo>
                   <a:lnTo>
-                    <a:pt x="71622" y="42491"/>
-                  </a:lnTo>
-                  <a:lnTo>
-                    <a:pt x="143245" y="84273"/>
-                  </a:lnTo>
-                  <a:lnTo>
-                    <a:pt x="214867" y="125357"/>
-                  </a:lnTo>
-                  <a:lnTo>
-                    <a:pt x="286490" y="165754"/>
-                  </a:lnTo>
-                  <a:lnTo>
-                    <a:pt x="358112" y="205477"/>
-                  </a:lnTo>
-                  <a:lnTo>
-                    <a:pt x="429735" y="244537"/>
-                  </a:lnTo>
-                  <a:lnTo>
-                    <a:pt x="501357" y="282944"/>
-                  </a:lnTo>
-                  <a:lnTo>
-                    <a:pt x="572980" y="320709"/>
-                  </a:lnTo>
-                  <a:lnTo>
-                    <a:pt x="644602" y="357844"/>
-                  </a:lnTo>
-                  <a:lnTo>
-                    <a:pt x="716225" y="394359"/>
-                  </a:lnTo>
-                  <a:lnTo>
-                    <a:pt x="787847" y="430264"/>
-                  </a:lnTo>
-                  <a:lnTo>
-                    <a:pt x="859470" y="465569"/>
-                  </a:lnTo>
-                  <a:lnTo>
-                    <a:pt x="931092" y="500284"/>
-                  </a:lnTo>
-                  <a:lnTo>
-                    <a:pt x="1002715" y="534420"/>
-                  </a:lnTo>
-                  <a:lnTo>
-                    <a:pt x="1074337" y="567985"/>
-                  </a:lnTo>
-                  <a:lnTo>
-                    <a:pt x="1145960" y="600990"/>
-                  </a:lnTo>
-                  <a:lnTo>
-                    <a:pt x="1217582" y="633443"/>
-                  </a:lnTo>
-                  <a:lnTo>
-                    <a:pt x="1289205" y="665355"/>
-                  </a:lnTo>
-                  <a:lnTo>
-                    <a:pt x="1360827" y="696733"/>
-                  </a:lnTo>
-                  <a:lnTo>
-                    <a:pt x="1432450" y="727588"/>
-                  </a:lnTo>
-                  <a:lnTo>
-                    <a:pt x="1504073" y="757927"/>
-                  </a:lnTo>
-                  <a:lnTo>
-                    <a:pt x="1575695" y="787759"/>
-                  </a:lnTo>
-                  <a:lnTo>
-                    <a:pt x="1647318" y="817093"/>
-                  </a:lnTo>
-                  <a:lnTo>
-                    <a:pt x="1718940" y="845937"/>
-                  </a:lnTo>
-                  <a:lnTo>
-                    <a:pt x="1790563" y="874300"/>
-                  </a:lnTo>
-                  <a:lnTo>
-                    <a:pt x="1862185" y="902188"/>
-                  </a:lnTo>
-                  <a:lnTo>
-                    <a:pt x="1933808" y="929611"/>
-                  </a:lnTo>
-                  <a:lnTo>
-                    <a:pt x="2005430" y="956576"/>
-                  </a:lnTo>
-                  <a:lnTo>
-                    <a:pt x="2077053" y="983091"/>
-                  </a:lnTo>
-                  <a:lnTo>
-                    <a:pt x="2148675" y="1009162"/>
-                  </a:lnTo>
-                  <a:lnTo>
-                    <a:pt x="2220298" y="1034798"/>
-                  </a:lnTo>
-                  <a:lnTo>
-                    <a:pt x="2291920" y="1060006"/>
-                  </a:lnTo>
-                  <a:lnTo>
-                    <a:pt x="2363543" y="1084793"/>
-                  </a:lnTo>
-                  <a:lnTo>
-                    <a:pt x="2435165" y="1109166"/>
-                  </a:lnTo>
-                  <a:lnTo>
-                    <a:pt x="2506788" y="1133132"/>
-                  </a:lnTo>
-                  <a:lnTo>
-                    <a:pt x="2578410" y="1156698"/>
-                  </a:lnTo>
-                  <a:lnTo>
-                    <a:pt x="2650033" y="1179870"/>
-                  </a:lnTo>
-                  <a:lnTo>
-                    <a:pt x="2721655" y="1202655"/>
-                  </a:lnTo>
-                  <a:lnTo>
-                    <a:pt x="2793278" y="1225059"/>
-                  </a:lnTo>
-                  <a:lnTo>
-                    <a:pt x="2864901" y="1247089"/>
-                  </a:lnTo>
-                  <a:lnTo>
-                    <a:pt x="2936523" y="1268751"/>
-                  </a:lnTo>
-                  <a:lnTo>
-                    <a:pt x="3008146" y="1290052"/>
-                  </a:lnTo>
-                  <a:lnTo>
-                    <a:pt x="3079768" y="1310996"/>
-                  </a:lnTo>
-                  <a:lnTo>
-                    <a:pt x="3151391" y="1331591"/>
-                  </a:lnTo>
-                  <a:lnTo>
-                    <a:pt x="3223013" y="1351842"/>
-                  </a:lnTo>
-                  <a:lnTo>
-                    <a:pt x="3294636" y="1371755"/>
-                  </a:lnTo>
-                  <a:lnTo>
-                    <a:pt x="3366258" y="1391335"/>
-                  </a:lnTo>
-                  <a:lnTo>
-                    <a:pt x="3437881" y="1410588"/>
-                  </a:lnTo>
-                  <a:lnTo>
-                    <a:pt x="3509503" y="1429519"/>
-                  </a:lnTo>
-                  <a:lnTo>
-                    <a:pt x="3581126" y="1448135"/>
-                  </a:lnTo>
-                  <a:lnTo>
-                    <a:pt x="3652748" y="1466439"/>
-                  </a:lnTo>
-                  <a:lnTo>
-                    <a:pt x="3724371" y="1484438"/>
-                  </a:lnTo>
-                  <a:lnTo>
-                    <a:pt x="3795993" y="1502136"/>
-                  </a:lnTo>
-                  <a:lnTo>
-                    <a:pt x="3867616" y="1519538"/>
-                  </a:lnTo>
-                  <a:lnTo>
-                    <a:pt x="3939238" y="1536650"/>
-                  </a:lnTo>
-                  <a:lnTo>
-                    <a:pt x="4010861" y="1553476"/>
-                  </a:lnTo>
-                  <a:lnTo>
-                    <a:pt x="4082483" y="1570021"/>
-                  </a:lnTo>
-                  <a:lnTo>
-                    <a:pt x="4154106" y="1586289"/>
-                  </a:lnTo>
-                  <a:lnTo>
-                    <a:pt x="4225729" y="1602286"/>
-                  </a:lnTo>
-                  <a:lnTo>
-                    <a:pt x="4297351" y="1618016"/>
-                  </a:lnTo>
-                  <a:lnTo>
-                    <a:pt x="4368974" y="1633483"/>
-                  </a:lnTo>
-                  <a:lnTo>
-                    <a:pt x="4440596" y="1648691"/>
-                  </a:lnTo>
-                  <a:lnTo>
-                    <a:pt x="4512219" y="1663646"/>
-                  </a:lnTo>
-                  <a:lnTo>
-                    <a:pt x="4583841" y="1678351"/>
-                  </a:lnTo>
-                  <a:lnTo>
-                    <a:pt x="4655464" y="1692810"/>
-                  </a:lnTo>
-                  <a:lnTo>
-                    <a:pt x="4727086" y="1707027"/>
-                  </a:lnTo>
-                  <a:lnTo>
-                    <a:pt x="4798709" y="1715687"/>
-                  </a:lnTo>
-                  <a:lnTo>
-                    <a:pt x="4870331" y="1718057"/>
-                  </a:lnTo>
-                  <a:lnTo>
-                    <a:pt x="4941954" y="1720420"/>
-                  </a:lnTo>
-                  <a:lnTo>
-                    <a:pt x="5013576" y="1722776"/>
-                  </a:lnTo>
-                  <a:lnTo>
-                    <a:pt x="5085199" y="1725126"/>
-                  </a:lnTo>
-                  <a:lnTo>
-                    <a:pt x="5156821" y="1727468"/>
-                  </a:lnTo>
-                  <a:lnTo>
-                    <a:pt x="5228444" y="1729805"/>
-                  </a:lnTo>
-                  <a:lnTo>
-                    <a:pt x="5300066" y="1732134"/>
-                  </a:lnTo>
-                  <a:lnTo>
-                    <a:pt x="5371689" y="1734457"/>
-                  </a:lnTo>
-                  <a:lnTo>
-                    <a:pt x="5443311" y="1736773"/>
-                  </a:lnTo>
-                  <a:lnTo>
-                    <a:pt x="5514934" y="1739082"/>
-                  </a:lnTo>
-                  <a:lnTo>
-                    <a:pt x="5586557" y="1741385"/>
-                  </a:lnTo>
-                  <a:lnTo>
-                    <a:pt x="5658179" y="1743681"/>
-                  </a:lnTo>
-                  <a:lnTo>
-                    <a:pt x="5729802" y="1745971"/>
-                  </a:lnTo>
-                  <a:lnTo>
-                    <a:pt x="5801424" y="1748254"/>
-                  </a:lnTo>
-                  <a:lnTo>
-                    <a:pt x="5873047" y="1750531"/>
-                  </a:lnTo>
-                  <a:lnTo>
-                    <a:pt x="5944669" y="1752801"/>
-                  </a:lnTo>
-                  <a:lnTo>
-                    <a:pt x="6016292" y="1755064"/>
-                  </a:lnTo>
-                  <a:lnTo>
-                    <a:pt x="6087914" y="1757321"/>
-                  </a:lnTo>
-                  <a:lnTo>
-                    <a:pt x="6159537" y="1759572"/>
-                  </a:lnTo>
-                  <a:lnTo>
-                    <a:pt x="6231159" y="1761816"/>
-                  </a:lnTo>
-                  <a:lnTo>
-                    <a:pt x="6302782" y="1764054"/>
-                  </a:lnTo>
-                  <a:lnTo>
-                    <a:pt x="6374404" y="1766286"/>
-                  </a:lnTo>
-                  <a:lnTo>
-                    <a:pt x="6446027" y="1768511"/>
-                  </a:lnTo>
-                  <a:lnTo>
-                    <a:pt x="6517649" y="1770729"/>
-                  </a:lnTo>
-                  <a:lnTo>
-                    <a:pt x="6589272" y="1772942"/>
-                  </a:lnTo>
-                  <a:lnTo>
-                    <a:pt x="6660894" y="1775148"/>
-                  </a:lnTo>
-                  <a:lnTo>
-                    <a:pt x="6732517" y="1777347"/>
-                  </a:lnTo>
-                  <a:lnTo>
-                    <a:pt x="6804139" y="1779541"/>
-                  </a:lnTo>
-                  <a:lnTo>
-                    <a:pt x="6875762" y="1781728"/>
-                  </a:lnTo>
-                  <a:lnTo>
-                    <a:pt x="6947385" y="1783908"/>
-                  </a:lnTo>
-                  <a:lnTo>
-                    <a:pt x="7019007" y="1786083"/>
-                  </a:lnTo>
-                  <a:lnTo>
-                    <a:pt x="7090630" y="1788251"/>
-                  </a:lnTo>
-                  <a:lnTo>
-                    <a:pt x="7090630" y="2063939"/>
-                  </a:lnTo>
-                  <a:lnTo>
-                    <a:pt x="7019007" y="2055784"/>
-                  </a:lnTo>
-                  <a:lnTo>
-                    <a:pt x="6947385" y="2047490"/>
-                  </a:lnTo>
-                  <a:lnTo>
-                    <a:pt x="6875762" y="2039055"/>
-                  </a:lnTo>
-                  <a:lnTo>
-                    <a:pt x="6804139" y="2030478"/>
-                  </a:lnTo>
-                  <a:lnTo>
-                    <a:pt x="6732517" y="2021754"/>
-                  </a:lnTo>
-                  <a:lnTo>
-                    <a:pt x="6660894" y="2012882"/>
-                  </a:lnTo>
-                  <a:lnTo>
-                    <a:pt x="6589272" y="2003860"/>
-                  </a:lnTo>
-                  <a:lnTo>
-                    <a:pt x="6517649" y="1994684"/>
-                  </a:lnTo>
-                  <a:lnTo>
-                    <a:pt x="6446027" y="1985352"/>
-                  </a:lnTo>
-                  <a:lnTo>
-                    <a:pt x="6374404" y="1975862"/>
-                  </a:lnTo>
-                  <a:lnTo>
-                    <a:pt x="6302782" y="1966211"/>
-                  </a:lnTo>
-                  <a:lnTo>
-                    <a:pt x="6231159" y="1956396"/>
-                  </a:lnTo>
-                  <a:lnTo>
-                    <a:pt x="6159537" y="1946414"/>
-                  </a:lnTo>
-                  <a:lnTo>
-                    <a:pt x="6087914" y="1936262"/>
-                  </a:lnTo>
-                  <a:lnTo>
-                    <a:pt x="6016292" y="1925938"/>
-                  </a:lnTo>
-                  <a:lnTo>
-                    <a:pt x="5944669" y="1915439"/>
-                  </a:lnTo>
-                  <a:lnTo>
-                    <a:pt x="5873047" y="1904761"/>
-                  </a:lnTo>
-                  <a:lnTo>
-                    <a:pt x="5801424" y="1893902"/>
-                  </a:lnTo>
-                  <a:lnTo>
-                    <a:pt x="5729802" y="1882859"/>
-                  </a:lnTo>
-                  <a:lnTo>
-                    <a:pt x="5658179" y="1871628"/>
-                  </a:lnTo>
-                  <a:lnTo>
-                    <a:pt x="5586557" y="1860206"/>
-                  </a:lnTo>
-                  <a:lnTo>
-                    <a:pt x="5514934" y="1848590"/>
-                  </a:lnTo>
-                  <a:lnTo>
-                    <a:pt x="5443311" y="1836777"/>
-                  </a:lnTo>
-                  <a:lnTo>
-                    <a:pt x="5371689" y="1824763"/>
-                  </a:lnTo>
-                  <a:lnTo>
-                    <a:pt x="5300066" y="1812545"/>
-                  </a:lnTo>
-                  <a:lnTo>
-                    <a:pt x="5228444" y="1800120"/>
-                  </a:lnTo>
-                  <a:lnTo>
-                    <a:pt x="5156821" y="1787483"/>
-                  </a:lnTo>
-                  <a:lnTo>
-                    <a:pt x="5085199" y="1774632"/>
-                  </a:lnTo>
-                  <a:lnTo>
-                    <a:pt x="5013576" y="1761563"/>
-                  </a:lnTo>
-                  <a:lnTo>
-                    <a:pt x="4941954" y="1748272"/>
-                  </a:lnTo>
-                  <a:lnTo>
-                    <a:pt x="4870331" y="1734754"/>
-                  </a:lnTo>
-                  <a:lnTo>
-                    <a:pt x="4798709" y="1721008"/>
-                  </a:lnTo>
-                  <a:lnTo>
-                    <a:pt x="4727086" y="1713311"/>
-                  </a:lnTo>
-                  <a:lnTo>
-                    <a:pt x="4655464" y="1710927"/>
-                  </a:lnTo>
-                  <a:lnTo>
-                    <a:pt x="4583841" y="1708537"/>
-                  </a:lnTo>
-                  <a:lnTo>
-                    <a:pt x="4512219" y="1706140"/>
-                  </a:lnTo>
-                  <a:lnTo>
-                    <a:pt x="4440596" y="1703736"/>
-                  </a:lnTo>
-                  <a:lnTo>
-                    <a:pt x="4368974" y="1701325"/>
-                  </a:lnTo>
-                  <a:lnTo>
-                    <a:pt x="4297351" y="1698907"/>
-                  </a:lnTo>
-                  <a:lnTo>
-                    <a:pt x="4225729" y="1696483"/>
-                  </a:lnTo>
-                  <a:lnTo>
-                    <a:pt x="4154106" y="1694051"/>
-                  </a:lnTo>
-                  <a:lnTo>
-                    <a:pt x="4082483" y="1691612"/>
-                  </a:lnTo>
-                  <a:lnTo>
-                    <a:pt x="4010861" y="1689167"/>
-                  </a:lnTo>
-                  <a:lnTo>
-                    <a:pt x="3939238" y="1686714"/>
-                  </a:lnTo>
-                  <a:lnTo>
-                    <a:pt x="3867616" y="1684254"/>
-                  </a:lnTo>
-                  <a:lnTo>
-                    <a:pt x="3795993" y="1681788"/>
-                  </a:lnTo>
-                  <a:lnTo>
-                    <a:pt x="3724371" y="1679314"/>
-                  </a:lnTo>
-                  <a:lnTo>
-                    <a:pt x="3652748" y="1676833"/>
-                  </a:lnTo>
-                  <a:lnTo>
-                    <a:pt x="3581126" y="1674345"/>
-                  </a:lnTo>
-                  <a:lnTo>
-                    <a:pt x="3509503" y="1671850"/>
-                  </a:lnTo>
-                  <a:lnTo>
-                    <a:pt x="3437881" y="1669347"/>
-                  </a:lnTo>
-                  <a:lnTo>
-                    <a:pt x="3366258" y="1666838"/>
-                  </a:lnTo>
-                  <a:lnTo>
-                    <a:pt x="3294636" y="1664321"/>
-                  </a:lnTo>
-                  <a:lnTo>
-                    <a:pt x="3223013" y="1661797"/>
-                  </a:lnTo>
-                  <a:lnTo>
-                    <a:pt x="3151391" y="1659266"/>
-                  </a:lnTo>
-                  <a:lnTo>
-                    <a:pt x="3079768" y="1656728"/>
-                  </a:lnTo>
-                  <a:lnTo>
-                    <a:pt x="3008146" y="1654182"/>
-                  </a:lnTo>
-                  <a:lnTo>
-                    <a:pt x="2936523" y="1651629"/>
-                  </a:lnTo>
-                  <a:lnTo>
-                    <a:pt x="2864901" y="1649069"/>
-                  </a:lnTo>
-                  <a:lnTo>
-                    <a:pt x="2793278" y="1646501"/>
-                  </a:lnTo>
-                  <a:lnTo>
-                    <a:pt x="2721655" y="1643926"/>
-                  </a:lnTo>
-                  <a:lnTo>
-                    <a:pt x="2650033" y="1641343"/>
-                  </a:lnTo>
-                  <a:lnTo>
-                    <a:pt x="2578410" y="1638753"/>
-                  </a:lnTo>
-                  <a:lnTo>
-                    <a:pt x="2506788" y="1636156"/>
-                  </a:lnTo>
-                  <a:lnTo>
-                    <a:pt x="2435165" y="1633551"/>
-                  </a:lnTo>
-                  <a:lnTo>
-                    <a:pt x="2363543" y="1630939"/>
-                  </a:lnTo>
-                  <a:lnTo>
-                    <a:pt x="2291920" y="1628320"/>
-                  </a:lnTo>
-                  <a:lnTo>
-                    <a:pt x="2220298" y="1625692"/>
-                  </a:lnTo>
-                  <a:lnTo>
-                    <a:pt x="2148675" y="1623058"/>
-                  </a:lnTo>
-                  <a:lnTo>
-                    <a:pt x="2077053" y="1620415"/>
-                  </a:lnTo>
-                  <a:lnTo>
-                    <a:pt x="2005430" y="1617765"/>
-                  </a:lnTo>
-                  <a:lnTo>
-                    <a:pt x="1933808" y="1615108"/>
-                  </a:lnTo>
-                  <a:lnTo>
-                    <a:pt x="1862185" y="1612443"/>
-                  </a:lnTo>
-                  <a:lnTo>
-                    <a:pt x="1790563" y="1609770"/>
-                  </a:lnTo>
-                  <a:lnTo>
-                    <a:pt x="1718940" y="1607089"/>
-                  </a:lnTo>
-                  <a:lnTo>
-                    <a:pt x="1647318" y="1604401"/>
-                  </a:lnTo>
-                  <a:lnTo>
-                    <a:pt x="1575695" y="1601706"/>
-                  </a:lnTo>
-                  <a:lnTo>
-                    <a:pt x="1504073" y="1599002"/>
-                  </a:lnTo>
-                  <a:lnTo>
-                    <a:pt x="1432450" y="1596291"/>
-                  </a:lnTo>
-                  <a:lnTo>
-                    <a:pt x="1360827" y="1593571"/>
-                  </a:lnTo>
-                  <a:lnTo>
-                    <a:pt x="1289205" y="1590845"/>
-                  </a:lnTo>
-                  <a:lnTo>
-                    <a:pt x="1217582" y="1588110"/>
-                  </a:lnTo>
-                  <a:lnTo>
-                    <a:pt x="1145960" y="1585367"/>
-                  </a:lnTo>
-                  <a:lnTo>
-                    <a:pt x="1074337" y="1582617"/>
-                  </a:lnTo>
-                  <a:lnTo>
-                    <a:pt x="1002715" y="1579858"/>
-                  </a:lnTo>
-                  <a:lnTo>
-                    <a:pt x="931092" y="1577092"/>
-                  </a:lnTo>
-                  <a:lnTo>
-                    <a:pt x="859470" y="1574318"/>
-                  </a:lnTo>
-                  <a:lnTo>
-                    <a:pt x="787847" y="1571536"/>
-                  </a:lnTo>
-                  <a:lnTo>
-                    <a:pt x="716225" y="1568746"/>
-                  </a:lnTo>
-                  <a:lnTo>
-                    <a:pt x="644602" y="1565948"/>
-                  </a:lnTo>
-                  <a:lnTo>
-                    <a:pt x="572980" y="1563141"/>
-                  </a:lnTo>
-                  <a:lnTo>
-                    <a:pt x="501357" y="1560327"/>
-                  </a:lnTo>
-                  <a:lnTo>
-                    <a:pt x="429735" y="1557505"/>
-                  </a:lnTo>
-                  <a:lnTo>
-                    <a:pt x="358112" y="1554675"/>
-                  </a:lnTo>
-                  <a:lnTo>
-                    <a:pt x="286490" y="1551836"/>
-                  </a:lnTo>
-                  <a:lnTo>
-                    <a:pt x="214867" y="1548989"/>
-                  </a:lnTo>
-                  <a:lnTo>
-                    <a:pt x="143245" y="1546135"/>
-                  </a:lnTo>
-                  <a:lnTo>
-                    <a:pt x="71622" y="1543272"/>
-                  </a:lnTo>
-                  <a:lnTo>
-                    <a:pt x="0" y="1540400"/>
+                    <a:pt x="71622" y="43043"/>
+                  </a:lnTo>
+                  <a:lnTo>
+                    <a:pt x="143245" y="85362"/>
+                  </a:lnTo>
+                  <a:lnTo>
+                    <a:pt x="214867" y="126971"/>
+                  </a:lnTo>
+                  <a:lnTo>
+                    <a:pt x="286490" y="167881"/>
+                  </a:lnTo>
+                  <a:lnTo>
+                    <a:pt x="358112" y="208103"/>
+                  </a:lnTo>
+                  <a:lnTo>
+                    <a:pt x="429735" y="247649"/>
+                  </a:lnTo>
+                  <a:lnTo>
+                    <a:pt x="501357" y="286531"/>
+                  </a:lnTo>
+                  <a:lnTo>
+                    <a:pt x="572980" y="324759"/>
+                  </a:lnTo>
+                  <a:lnTo>
+                    <a:pt x="644602" y="362345"/>
+                  </a:lnTo>
+                  <a:lnTo>
+                    <a:pt x="716225" y="399300"/>
+                  </a:lnTo>
+                  <a:lnTo>
+                    <a:pt x="787847" y="435633"/>
+                  </a:lnTo>
+                  <a:lnTo>
+                    <a:pt x="859470" y="471356"/>
+                  </a:lnTo>
+                  <a:lnTo>
+                    <a:pt x="931092" y="506479"/>
+                  </a:lnTo>
+                  <a:lnTo>
+                    <a:pt x="1002715" y="541011"/>
+                  </a:lnTo>
+                  <a:lnTo>
+                    <a:pt x="1074337" y="574963"/>
+                  </a:lnTo>
+                  <a:lnTo>
+                    <a:pt x="1145960" y="608345"/>
+                  </a:lnTo>
+                  <a:lnTo>
+                    <a:pt x="1217582" y="641166"/>
+                  </a:lnTo>
+                  <a:lnTo>
+                    <a:pt x="1289205" y="673435"/>
+                  </a:lnTo>
+                  <a:lnTo>
+                    <a:pt x="1360827" y="705162"/>
+                  </a:lnTo>
+                  <a:lnTo>
+                    <a:pt x="1432450" y="736356"/>
+                  </a:lnTo>
+                  <a:lnTo>
+                    <a:pt x="1504073" y="767026"/>
+                  </a:lnTo>
+                  <a:lnTo>
+                    <a:pt x="1575695" y="797180"/>
+                  </a:lnTo>
+                  <a:lnTo>
+                    <a:pt x="1647318" y="826828"/>
+                  </a:lnTo>
+                  <a:lnTo>
+                    <a:pt x="1718940" y="855977"/>
+                  </a:lnTo>
+                  <a:lnTo>
+                    <a:pt x="1790563" y="884637"/>
+                  </a:lnTo>
+                  <a:lnTo>
+                    <a:pt x="1862185" y="912815"/>
+                  </a:lnTo>
+                  <a:lnTo>
+                    <a:pt x="1933808" y="940519"/>
+                  </a:lnTo>
+                  <a:lnTo>
+                    <a:pt x="2005430" y="967759"/>
+                  </a:lnTo>
+                  <a:lnTo>
+                    <a:pt x="2077053" y="994540"/>
+                  </a:lnTo>
+                  <a:lnTo>
+                    <a:pt x="2148675" y="1020871"/>
+                  </a:lnTo>
+                  <a:lnTo>
+                    <a:pt x="2220298" y="1046760"/>
+                  </a:lnTo>
+                  <a:lnTo>
+                    <a:pt x="2291920" y="1072214"/>
+                  </a:lnTo>
+                  <a:lnTo>
+                    <a:pt x="2363543" y="1097240"/>
+                  </a:lnTo>
+                  <a:lnTo>
+                    <a:pt x="2435165" y="1121846"/>
+                  </a:lnTo>
+                  <a:lnTo>
+                    <a:pt x="2506788" y="1146038"/>
+                  </a:lnTo>
+                  <a:lnTo>
+                    <a:pt x="2578410" y="1169823"/>
+                  </a:lnTo>
+                  <a:lnTo>
+                    <a:pt x="2650033" y="1193209"/>
+                  </a:lnTo>
+                  <a:lnTo>
+                    <a:pt x="2721655" y="1216202"/>
+                  </a:lnTo>
+                  <a:lnTo>
+                    <a:pt x="2793278" y="1238809"/>
+                  </a:lnTo>
+                  <a:lnTo>
+                    <a:pt x="2864901" y="1261036"/>
+                  </a:lnTo>
+                  <a:lnTo>
+                    <a:pt x="2936523" y="1282889"/>
+                  </a:lnTo>
+                  <a:lnTo>
+                    <a:pt x="3008146" y="1304375"/>
+                  </a:lnTo>
+                  <a:lnTo>
+                    <a:pt x="3079768" y="1325500"/>
+                  </a:lnTo>
+                  <a:lnTo>
+                    <a:pt x="3151391" y="1346270"/>
+                  </a:lnTo>
+                  <a:lnTo>
+                    <a:pt x="3223013" y="1366691"/>
+                  </a:lnTo>
+                  <a:lnTo>
+                    <a:pt x="3294636" y="1386769"/>
+                  </a:lnTo>
+                  <a:lnTo>
+                    <a:pt x="3366258" y="1406510"/>
+                  </a:lnTo>
+                  <a:lnTo>
+                    <a:pt x="3437881" y="1425918"/>
+                  </a:lnTo>
+                  <a:lnTo>
+                    <a:pt x="3509503" y="1445001"/>
+                  </a:lnTo>
+                  <a:lnTo>
+                    <a:pt x="3581126" y="1463763"/>
+                  </a:lnTo>
+                  <a:lnTo>
+                    <a:pt x="3652748" y="1482210"/>
+                  </a:lnTo>
+                  <a:lnTo>
+                    <a:pt x="3724371" y="1500346"/>
+                  </a:lnTo>
+                  <a:lnTo>
+                    <a:pt x="3795993" y="1518178"/>
+                  </a:lnTo>
+                  <a:lnTo>
+                    <a:pt x="3867616" y="1535711"/>
+                  </a:lnTo>
+                  <a:lnTo>
+                    <a:pt x="3939238" y="1552949"/>
+                  </a:lnTo>
+                  <a:lnTo>
+                    <a:pt x="4010861" y="1569897"/>
+                  </a:lnTo>
+                  <a:lnTo>
+                    <a:pt x="4082483" y="1586560"/>
+                  </a:lnTo>
+                  <a:lnTo>
+                    <a:pt x="4154106" y="1602943"/>
+                  </a:lnTo>
+                  <a:lnTo>
+                    <a:pt x="4225729" y="1619051"/>
+                  </a:lnTo>
+                  <a:lnTo>
+                    <a:pt x="4297351" y="1634889"/>
+                  </a:lnTo>
+                  <a:lnTo>
+                    <a:pt x="4368974" y="1650460"/>
+                  </a:lnTo>
+                  <a:lnTo>
+                    <a:pt x="4440596" y="1665769"/>
+                  </a:lnTo>
+                  <a:lnTo>
+                    <a:pt x="4512219" y="1680822"/>
+                  </a:lnTo>
+                  <a:lnTo>
+                    <a:pt x="4583841" y="1695621"/>
+                  </a:lnTo>
+                  <a:lnTo>
+                    <a:pt x="4655464" y="1710172"/>
+                  </a:lnTo>
+                  <a:lnTo>
+                    <a:pt x="4727086" y="1724478"/>
+                  </a:lnTo>
+                  <a:lnTo>
+                    <a:pt x="4798709" y="1733249"/>
+                  </a:lnTo>
+                  <a:lnTo>
+                    <a:pt x="4870331" y="1735758"/>
+                  </a:lnTo>
+                  <a:lnTo>
+                    <a:pt x="4941954" y="1738260"/>
+                  </a:lnTo>
+                  <a:lnTo>
+                    <a:pt x="5013576" y="1740754"/>
+                  </a:lnTo>
+                  <a:lnTo>
+                    <a:pt x="5085199" y="1743240"/>
+                  </a:lnTo>
+                  <a:lnTo>
+                    <a:pt x="5156821" y="1745719"/>
+                  </a:lnTo>
+                  <a:lnTo>
+                    <a:pt x="5228444" y="1748191"/>
+                  </a:lnTo>
+                  <a:lnTo>
+                    <a:pt x="5300066" y="1750655"/>
+                  </a:lnTo>
+                  <a:lnTo>
+                    <a:pt x="5371689" y="1753111"/>
+                  </a:lnTo>
+                  <a:lnTo>
+                    <a:pt x="5443311" y="1755560"/>
+                  </a:lnTo>
+                  <a:lnTo>
+                    <a:pt x="5514934" y="1758002"/>
+                  </a:lnTo>
+                  <a:lnTo>
+                    <a:pt x="5586557" y="1760436"/>
+                  </a:lnTo>
+                  <a:lnTo>
+                    <a:pt x="5658179" y="1762863"/>
+                  </a:lnTo>
+                  <a:lnTo>
+                    <a:pt x="5729802" y="1765283"/>
+                  </a:lnTo>
+                  <a:lnTo>
+                    <a:pt x="5801424" y="1767695"/>
+                  </a:lnTo>
+                  <a:lnTo>
+                    <a:pt x="5873047" y="1770100"/>
+                  </a:lnTo>
+                  <a:lnTo>
+                    <a:pt x="5944669" y="1772497"/>
+                  </a:lnTo>
+                  <a:lnTo>
+                    <a:pt x="6016292" y="1774888"/>
+                  </a:lnTo>
+                  <a:lnTo>
+                    <a:pt x="6087914" y="1777271"/>
+                  </a:lnTo>
+                  <a:lnTo>
+                    <a:pt x="6159537" y="1779647"/>
+                  </a:lnTo>
+                  <a:lnTo>
+                    <a:pt x="6231159" y="1782015"/>
+                  </a:lnTo>
+                  <a:lnTo>
+                    <a:pt x="6302782" y="1784377"/>
+                  </a:lnTo>
+                  <a:lnTo>
+                    <a:pt x="6374404" y="1786731"/>
+                  </a:lnTo>
+                  <a:lnTo>
+                    <a:pt x="6446027" y="1789078"/>
+                  </a:lnTo>
+                  <a:lnTo>
+                    <a:pt x="6517649" y="1791419"/>
+                  </a:lnTo>
+                  <a:lnTo>
+                    <a:pt x="6589272" y="1793752"/>
+                  </a:lnTo>
+                  <a:lnTo>
+                    <a:pt x="6660894" y="1796078"/>
+                  </a:lnTo>
+                  <a:lnTo>
+                    <a:pt x="6732517" y="1798397"/>
+                  </a:lnTo>
+                  <a:lnTo>
+                    <a:pt x="6804139" y="1800708"/>
+                  </a:lnTo>
+                  <a:lnTo>
+                    <a:pt x="6875762" y="1803013"/>
+                  </a:lnTo>
+                  <a:lnTo>
+                    <a:pt x="6947385" y="1805311"/>
+                  </a:lnTo>
+                  <a:lnTo>
+                    <a:pt x="7019007" y="1807602"/>
+                  </a:lnTo>
+                  <a:lnTo>
+                    <a:pt x="7090630" y="1809886"/>
+                  </a:lnTo>
+                  <a:lnTo>
+                    <a:pt x="7090630" y="2083039"/>
+                  </a:lnTo>
+                  <a:lnTo>
+                    <a:pt x="7019007" y="2074861"/>
+                  </a:lnTo>
+                  <a:lnTo>
+                    <a:pt x="6947385" y="2066543"/>
+                  </a:lnTo>
+                  <a:lnTo>
+                    <a:pt x="6875762" y="2058083"/>
+                  </a:lnTo>
+                  <a:lnTo>
+                    <a:pt x="6804139" y="2049478"/>
+                  </a:lnTo>
+                  <a:lnTo>
+                    <a:pt x="6732517" y="2040726"/>
+                  </a:lnTo>
+                  <a:lnTo>
+                    <a:pt x="6660894" y="2031825"/>
+                  </a:lnTo>
+                  <a:lnTo>
+                    <a:pt x="6589272" y="2022772"/>
+                  </a:lnTo>
+                  <a:lnTo>
+                    <a:pt x="6517649" y="2013563"/>
+                  </a:lnTo>
+                  <a:lnTo>
+                    <a:pt x="6446027" y="2004198"/>
+                  </a:lnTo>
+                  <a:lnTo>
+                    <a:pt x="6374404" y="1994672"/>
+                  </a:lnTo>
+                  <a:lnTo>
+                    <a:pt x="6302782" y="1984984"/>
+                  </a:lnTo>
+                  <a:lnTo>
+                    <a:pt x="6231159" y="1975130"/>
+                  </a:lnTo>
+                  <a:lnTo>
+                    <a:pt x="6159537" y="1965108"/>
+                  </a:lnTo>
+                  <a:lnTo>
+                    <a:pt x="6087914" y="1954914"/>
+                  </a:lnTo>
+                  <a:lnTo>
+                    <a:pt x="6016292" y="1944546"/>
+                  </a:lnTo>
+                  <a:lnTo>
+                    <a:pt x="5944669" y="1934001"/>
+                  </a:lnTo>
+                  <a:lnTo>
+                    <a:pt x="5873047" y="1923276"/>
+                  </a:lnTo>
+                  <a:lnTo>
+                    <a:pt x="5801424" y="1912367"/>
+                  </a:lnTo>
+                  <a:lnTo>
+                    <a:pt x="5729802" y="1901272"/>
+                  </a:lnTo>
+                  <a:lnTo>
+                    <a:pt x="5658179" y="1889987"/>
+                  </a:lnTo>
+                  <a:lnTo>
+                    <a:pt x="5586557" y="1878510"/>
+                  </a:lnTo>
+                  <a:lnTo>
+                    <a:pt x="5514934" y="1866836"/>
+                  </a:lnTo>
+                  <a:lnTo>
+                    <a:pt x="5443311" y="1854963"/>
+                  </a:lnTo>
+                  <a:lnTo>
+                    <a:pt x="5371689" y="1842887"/>
+                  </a:lnTo>
+                  <a:lnTo>
+                    <a:pt x="5300066" y="1830604"/>
+                  </a:lnTo>
+                  <a:lnTo>
+                    <a:pt x="5228444" y="1818112"/>
+                  </a:lnTo>
+                  <a:lnTo>
+                    <a:pt x="5156821" y="1805406"/>
+                  </a:lnTo>
+                  <a:lnTo>
+                    <a:pt x="5085199" y="1792483"/>
+                  </a:lnTo>
+                  <a:lnTo>
+                    <a:pt x="5013576" y="1779339"/>
+                  </a:lnTo>
+                  <a:lnTo>
+                    <a:pt x="4941954" y="1765970"/>
+                  </a:lnTo>
+                  <a:lnTo>
+                    <a:pt x="4870331" y="1752373"/>
+                  </a:lnTo>
+                  <a:lnTo>
+                    <a:pt x="4798709" y="1738544"/>
+                  </a:lnTo>
+                  <a:lnTo>
+                    <a:pt x="4727086" y="1730732"/>
+                  </a:lnTo>
+                  <a:lnTo>
+                    <a:pt x="4655464" y="1728207"/>
+                  </a:lnTo>
+                  <a:lnTo>
+                    <a:pt x="4583841" y="1725675"/>
+                  </a:lnTo>
+                  <a:lnTo>
+                    <a:pt x="4512219" y="1723135"/>
+                  </a:lnTo>
+                  <a:lnTo>
+                    <a:pt x="4440596" y="1720588"/>
+                  </a:lnTo>
+                  <a:lnTo>
+                    <a:pt x="4368974" y="1718032"/>
+                  </a:lnTo>
+                  <a:lnTo>
+                    <a:pt x="4297351" y="1715469"/>
+                  </a:lnTo>
+                  <a:lnTo>
+                    <a:pt x="4225729" y="1712898"/>
+                  </a:lnTo>
+                  <a:lnTo>
+                    <a:pt x="4154106" y="1710320"/>
+                  </a:lnTo>
+                  <a:lnTo>
+                    <a:pt x="4082483" y="1707733"/>
+                  </a:lnTo>
+                  <a:lnTo>
+                    <a:pt x="4010861" y="1705139"/>
+                  </a:lnTo>
+                  <a:lnTo>
+                    <a:pt x="3939238" y="1702536"/>
+                  </a:lnTo>
+                  <a:lnTo>
+                    <a:pt x="3867616" y="1699926"/>
+                  </a:lnTo>
+                  <a:lnTo>
+                    <a:pt x="3795993" y="1697308"/>
+                  </a:lnTo>
+                  <a:lnTo>
+                    <a:pt x="3724371" y="1694682"/>
+                  </a:lnTo>
+                  <a:lnTo>
+                    <a:pt x="3652748" y="1692048"/>
+                  </a:lnTo>
+                  <a:lnTo>
+                    <a:pt x="3581126" y="1689406"/>
+                  </a:lnTo>
+                  <a:lnTo>
+                    <a:pt x="3509503" y="1686756"/>
+                  </a:lnTo>
+                  <a:lnTo>
+                    <a:pt x="3437881" y="1684098"/>
+                  </a:lnTo>
+                  <a:lnTo>
+                    <a:pt x="3366258" y="1681431"/>
+                  </a:lnTo>
+                  <a:lnTo>
+                    <a:pt x="3294636" y="1678757"/>
+                  </a:lnTo>
+                  <a:lnTo>
+                    <a:pt x="3223013" y="1676075"/>
+                  </a:lnTo>
+                  <a:lnTo>
+                    <a:pt x="3151391" y="1673384"/>
+                  </a:lnTo>
+                  <a:lnTo>
+                    <a:pt x="3079768" y="1670685"/>
+                  </a:lnTo>
+                  <a:lnTo>
+                    <a:pt x="3008146" y="1667978"/>
+                  </a:lnTo>
+                  <a:lnTo>
+                    <a:pt x="2936523" y="1665263"/>
+                  </a:lnTo>
+                  <a:lnTo>
+                    <a:pt x="2864901" y="1662540"/>
+                  </a:lnTo>
+                  <a:lnTo>
+                    <a:pt x="2793278" y="1659808"/>
+                  </a:lnTo>
+                  <a:lnTo>
+                    <a:pt x="2721655" y="1657068"/>
+                  </a:lnTo>
+                  <a:lnTo>
+                    <a:pt x="2650033" y="1654320"/>
+                  </a:lnTo>
+                  <a:lnTo>
+                    <a:pt x="2578410" y="1651563"/>
+                  </a:lnTo>
+                  <a:lnTo>
+                    <a:pt x="2506788" y="1648798"/>
+                  </a:lnTo>
+                  <a:lnTo>
+                    <a:pt x="2435165" y="1646024"/>
+                  </a:lnTo>
+                  <a:lnTo>
+                    <a:pt x="2363543" y="1643242"/>
+                  </a:lnTo>
+                  <a:lnTo>
+                    <a:pt x="2291920" y="1640452"/>
+                  </a:lnTo>
+                  <a:lnTo>
+                    <a:pt x="2220298" y="1637653"/>
+                  </a:lnTo>
+                  <a:lnTo>
+                    <a:pt x="2148675" y="1634846"/>
+                  </a:lnTo>
+                  <a:lnTo>
+                    <a:pt x="2077053" y="1632030"/>
+                  </a:lnTo>
+                  <a:lnTo>
+                    <a:pt x="2005430" y="1629206"/>
+                  </a:lnTo>
+                  <a:lnTo>
+                    <a:pt x="1933808" y="1626373"/>
+                  </a:lnTo>
+                  <a:lnTo>
+                    <a:pt x="1862185" y="1623531"/>
+                  </a:lnTo>
+                  <a:lnTo>
+                    <a:pt x="1790563" y="1620681"/>
+                  </a:lnTo>
+                  <a:lnTo>
+                    <a:pt x="1718940" y="1617822"/>
+                  </a:lnTo>
+                  <a:lnTo>
+                    <a:pt x="1647318" y="1614954"/>
+                  </a:lnTo>
+                  <a:lnTo>
+                    <a:pt x="1575695" y="1612078"/>
+                  </a:lnTo>
+                  <a:lnTo>
+                    <a:pt x="1504073" y="1609193"/>
+                  </a:lnTo>
+                  <a:lnTo>
+                    <a:pt x="1432450" y="1606299"/>
+                  </a:lnTo>
+                  <a:lnTo>
+                    <a:pt x="1360827" y="1603396"/>
+                  </a:lnTo>
+                  <a:lnTo>
+                    <a:pt x="1289205" y="1600485"/>
+                  </a:lnTo>
+                  <a:lnTo>
+                    <a:pt x="1217582" y="1597565"/>
+                  </a:lnTo>
+                  <a:lnTo>
+                    <a:pt x="1145960" y="1594635"/>
+                  </a:lnTo>
+                  <a:lnTo>
+                    <a:pt x="1074337" y="1591697"/>
+                  </a:lnTo>
+                  <a:lnTo>
+                    <a:pt x="1002715" y="1588750"/>
+                  </a:lnTo>
+                  <a:lnTo>
+                    <a:pt x="931092" y="1585794"/>
+                  </a:lnTo>
+                  <a:lnTo>
+                    <a:pt x="859470" y="1582830"/>
+                  </a:lnTo>
+                  <a:lnTo>
+                    <a:pt x="787847" y="1579856"/>
+                  </a:lnTo>
+                  <a:lnTo>
+                    <a:pt x="716225" y="1576873"/>
+                  </a:lnTo>
+                  <a:lnTo>
+                    <a:pt x="644602" y="1573881"/>
+                  </a:lnTo>
+                  <a:lnTo>
+                    <a:pt x="572980" y="1570879"/>
+                  </a:lnTo>
+                  <a:lnTo>
+                    <a:pt x="501357" y="1567869"/>
+                  </a:lnTo>
+                  <a:lnTo>
+                    <a:pt x="429735" y="1564850"/>
+                  </a:lnTo>
+                  <a:lnTo>
+                    <a:pt x="358112" y="1561821"/>
+                  </a:lnTo>
+                  <a:lnTo>
+                    <a:pt x="286490" y="1558784"/>
+                  </a:lnTo>
+                  <a:lnTo>
+                    <a:pt x="214867" y="1555737"/>
+                  </a:lnTo>
+                  <a:lnTo>
+                    <a:pt x="143245" y="1552680"/>
+                  </a:lnTo>
+                  <a:lnTo>
+                    <a:pt x="71622" y="1549615"/>
+                  </a:lnTo>
+                  <a:lnTo>
+                    <a:pt x="0" y="1546540"/>
                   </a:lnTo>
                   <a:close/>
                 </a:path>
@@ -3676,312 +3676,312 @@
           </p:nvSpPr>
           <p:spPr>
             <a:xfrm>
-              <a:off x="1172049" y="3013193"/>
-              <a:ext cx="7090630" cy="1788251"/>
+              <a:off x="1172049" y="2995696"/>
+              <a:ext cx="7090630" cy="1809886"/>
             </a:xfrm>
             <a:custGeom>
               <a:avLst/>
               <a:pathLst>
-                <a:path w="7090630" h="1788251">
+                <a:path w="7090630" h="1809886">
                   <a:moveTo>
                     <a:pt x="0" y="0"/>
                   </a:moveTo>
                   <a:lnTo>
-                    <a:pt x="71622" y="42491"/>
-                  </a:lnTo>
-                  <a:lnTo>
-                    <a:pt x="143245" y="84273"/>
-                  </a:lnTo>
-                  <a:lnTo>
-                    <a:pt x="214867" y="125357"/>
-                  </a:lnTo>
-                  <a:lnTo>
-                    <a:pt x="286490" y="165754"/>
-                  </a:lnTo>
-                  <a:lnTo>
-                    <a:pt x="358112" y="205477"/>
-                  </a:lnTo>
-                  <a:lnTo>
-                    <a:pt x="429735" y="244537"/>
-                  </a:lnTo>
-                  <a:lnTo>
-                    <a:pt x="501357" y="282944"/>
-                  </a:lnTo>
-                  <a:lnTo>
-                    <a:pt x="572980" y="320709"/>
-                  </a:lnTo>
-                  <a:lnTo>
-                    <a:pt x="644602" y="357844"/>
-                  </a:lnTo>
-                  <a:lnTo>
-                    <a:pt x="716225" y="394359"/>
-                  </a:lnTo>
-                  <a:lnTo>
-                    <a:pt x="787847" y="430264"/>
-                  </a:lnTo>
-                  <a:lnTo>
-                    <a:pt x="859470" y="465569"/>
-                  </a:lnTo>
-                  <a:lnTo>
-                    <a:pt x="931092" y="500284"/>
-                  </a:lnTo>
-                  <a:lnTo>
-                    <a:pt x="1002715" y="534420"/>
-                  </a:lnTo>
-                  <a:lnTo>
-                    <a:pt x="1074337" y="567985"/>
-                  </a:lnTo>
-                  <a:lnTo>
-                    <a:pt x="1145960" y="600990"/>
-                  </a:lnTo>
-                  <a:lnTo>
-                    <a:pt x="1217582" y="633443"/>
-                  </a:lnTo>
-                  <a:lnTo>
-                    <a:pt x="1289205" y="665355"/>
-                  </a:lnTo>
-                  <a:lnTo>
-                    <a:pt x="1360827" y="696733"/>
-                  </a:lnTo>
-                  <a:lnTo>
-                    <a:pt x="1432450" y="727588"/>
-                  </a:lnTo>
-                  <a:lnTo>
-                    <a:pt x="1504073" y="757927"/>
-                  </a:lnTo>
-                  <a:lnTo>
-                    <a:pt x="1575695" y="787759"/>
-                  </a:lnTo>
-                  <a:lnTo>
-                    <a:pt x="1647318" y="817093"/>
-                  </a:lnTo>
-                  <a:lnTo>
-                    <a:pt x="1718940" y="845937"/>
-                  </a:lnTo>
-                  <a:lnTo>
-                    <a:pt x="1790563" y="874300"/>
-                  </a:lnTo>
-                  <a:lnTo>
-                    <a:pt x="1862185" y="902188"/>
-                  </a:lnTo>
-                  <a:lnTo>
-                    <a:pt x="1933808" y="929611"/>
-                  </a:lnTo>
-                  <a:lnTo>
-                    <a:pt x="2005430" y="956576"/>
-                  </a:lnTo>
-                  <a:lnTo>
-                    <a:pt x="2077053" y="983091"/>
-                  </a:lnTo>
-                  <a:lnTo>
-                    <a:pt x="2148675" y="1009162"/>
-                  </a:lnTo>
-                  <a:lnTo>
-                    <a:pt x="2220298" y="1034798"/>
-                  </a:lnTo>
-                  <a:lnTo>
-                    <a:pt x="2291920" y="1060006"/>
-                  </a:lnTo>
-                  <a:lnTo>
-                    <a:pt x="2363543" y="1084793"/>
-                  </a:lnTo>
-                  <a:lnTo>
-                    <a:pt x="2435165" y="1109166"/>
-                  </a:lnTo>
-                  <a:lnTo>
-                    <a:pt x="2506788" y="1133132"/>
-                  </a:lnTo>
-                  <a:lnTo>
-                    <a:pt x="2578410" y="1156698"/>
-                  </a:lnTo>
-                  <a:lnTo>
-                    <a:pt x="2650033" y="1179870"/>
-                  </a:lnTo>
-                  <a:lnTo>
-                    <a:pt x="2721655" y="1202655"/>
-                  </a:lnTo>
-                  <a:lnTo>
-                    <a:pt x="2793278" y="1225059"/>
-                  </a:lnTo>
-                  <a:lnTo>
-                    <a:pt x="2864901" y="1247089"/>
-                  </a:lnTo>
-                  <a:lnTo>
-                    <a:pt x="2936523" y="1268751"/>
-                  </a:lnTo>
-                  <a:lnTo>
-                    <a:pt x="3008146" y="1290052"/>
-                  </a:lnTo>
-                  <a:lnTo>
-                    <a:pt x="3079768" y="1310996"/>
-                  </a:lnTo>
-                  <a:lnTo>
-                    <a:pt x="3151391" y="1331591"/>
-                  </a:lnTo>
-                  <a:lnTo>
-                    <a:pt x="3223013" y="1351842"/>
-                  </a:lnTo>
-                  <a:lnTo>
-                    <a:pt x="3294636" y="1371755"/>
-                  </a:lnTo>
-                  <a:lnTo>
-                    <a:pt x="3366258" y="1391335"/>
-                  </a:lnTo>
-                  <a:lnTo>
-                    <a:pt x="3437881" y="1410588"/>
-                  </a:lnTo>
-                  <a:lnTo>
-                    <a:pt x="3509503" y="1429519"/>
-                  </a:lnTo>
-                  <a:lnTo>
-                    <a:pt x="3581126" y="1448135"/>
-                  </a:lnTo>
-                  <a:lnTo>
-                    <a:pt x="3652748" y="1466439"/>
-                  </a:lnTo>
-                  <a:lnTo>
-                    <a:pt x="3724371" y="1484438"/>
-                  </a:lnTo>
-                  <a:lnTo>
-                    <a:pt x="3795993" y="1502136"/>
-                  </a:lnTo>
-                  <a:lnTo>
-                    <a:pt x="3867616" y="1519538"/>
-                  </a:lnTo>
-                  <a:lnTo>
-                    <a:pt x="3939238" y="1536650"/>
-                  </a:lnTo>
-                  <a:lnTo>
-                    <a:pt x="4010861" y="1553476"/>
-                  </a:lnTo>
-                  <a:lnTo>
-                    <a:pt x="4082483" y="1570021"/>
-                  </a:lnTo>
-                  <a:lnTo>
-                    <a:pt x="4154106" y="1586289"/>
-                  </a:lnTo>
-                  <a:lnTo>
-                    <a:pt x="4225729" y="1602286"/>
-                  </a:lnTo>
-                  <a:lnTo>
-                    <a:pt x="4297351" y="1618016"/>
-                  </a:lnTo>
-                  <a:lnTo>
-                    <a:pt x="4368974" y="1633483"/>
-                  </a:lnTo>
-                  <a:lnTo>
-                    <a:pt x="4440596" y="1648691"/>
-                  </a:lnTo>
-                  <a:lnTo>
-                    <a:pt x="4512219" y="1663646"/>
-                  </a:lnTo>
-                  <a:lnTo>
-                    <a:pt x="4583841" y="1678351"/>
-                  </a:lnTo>
-                  <a:lnTo>
-                    <a:pt x="4655464" y="1692810"/>
-                  </a:lnTo>
-                  <a:lnTo>
-                    <a:pt x="4727086" y="1707027"/>
-                  </a:lnTo>
-                  <a:lnTo>
-                    <a:pt x="4798709" y="1715687"/>
-                  </a:lnTo>
-                  <a:lnTo>
-                    <a:pt x="4870331" y="1718057"/>
-                  </a:lnTo>
-                  <a:lnTo>
-                    <a:pt x="4941954" y="1720420"/>
-                  </a:lnTo>
-                  <a:lnTo>
-                    <a:pt x="5013576" y="1722776"/>
-                  </a:lnTo>
-                  <a:lnTo>
-                    <a:pt x="5085199" y="1725126"/>
-                  </a:lnTo>
-                  <a:lnTo>
-                    <a:pt x="5156821" y="1727468"/>
-                  </a:lnTo>
-                  <a:lnTo>
-                    <a:pt x="5228444" y="1729805"/>
-                  </a:lnTo>
-                  <a:lnTo>
-                    <a:pt x="5300066" y="1732134"/>
-                  </a:lnTo>
-                  <a:lnTo>
-                    <a:pt x="5371689" y="1734457"/>
-                  </a:lnTo>
-                  <a:lnTo>
-                    <a:pt x="5443311" y="1736773"/>
-                  </a:lnTo>
-                  <a:lnTo>
-                    <a:pt x="5514934" y="1739082"/>
-                  </a:lnTo>
-                  <a:lnTo>
-                    <a:pt x="5586557" y="1741385"/>
-                  </a:lnTo>
-                  <a:lnTo>
-                    <a:pt x="5658179" y="1743681"/>
-                  </a:lnTo>
-                  <a:lnTo>
-                    <a:pt x="5729802" y="1745971"/>
-                  </a:lnTo>
-                  <a:lnTo>
-                    <a:pt x="5801424" y="1748254"/>
-                  </a:lnTo>
-                  <a:lnTo>
-                    <a:pt x="5873047" y="1750531"/>
-                  </a:lnTo>
-                  <a:lnTo>
-                    <a:pt x="5944669" y="1752801"/>
-                  </a:lnTo>
-                  <a:lnTo>
-                    <a:pt x="6016292" y="1755064"/>
-                  </a:lnTo>
-                  <a:lnTo>
-                    <a:pt x="6087914" y="1757321"/>
-                  </a:lnTo>
-                  <a:lnTo>
-                    <a:pt x="6159537" y="1759572"/>
-                  </a:lnTo>
-                  <a:lnTo>
-                    <a:pt x="6231159" y="1761816"/>
-                  </a:lnTo>
-                  <a:lnTo>
-                    <a:pt x="6302782" y="1764054"/>
-                  </a:lnTo>
-                  <a:lnTo>
-                    <a:pt x="6374404" y="1766286"/>
-                  </a:lnTo>
-                  <a:lnTo>
-                    <a:pt x="6446027" y="1768511"/>
-                  </a:lnTo>
-                  <a:lnTo>
-                    <a:pt x="6517649" y="1770729"/>
-                  </a:lnTo>
-                  <a:lnTo>
-                    <a:pt x="6589272" y="1772942"/>
-                  </a:lnTo>
-                  <a:lnTo>
-                    <a:pt x="6660894" y="1775148"/>
-                  </a:lnTo>
-                  <a:lnTo>
-                    <a:pt x="6732517" y="1777347"/>
-                  </a:lnTo>
-                  <a:lnTo>
-                    <a:pt x="6804139" y="1779541"/>
-                  </a:lnTo>
-                  <a:lnTo>
-                    <a:pt x="6875762" y="1781728"/>
-                  </a:lnTo>
-                  <a:lnTo>
-                    <a:pt x="6947385" y="1783908"/>
-                  </a:lnTo>
-                  <a:lnTo>
-                    <a:pt x="7019007" y="1786083"/>
-                  </a:lnTo>
-                  <a:lnTo>
-                    <a:pt x="7090630" y="1788251"/>
+                    <a:pt x="71622" y="43043"/>
+                  </a:lnTo>
+                  <a:lnTo>
+                    <a:pt x="143245" y="85362"/>
+                  </a:lnTo>
+                  <a:lnTo>
+                    <a:pt x="214867" y="126971"/>
+                  </a:lnTo>
+                  <a:lnTo>
+                    <a:pt x="286490" y="167881"/>
+                  </a:lnTo>
+                  <a:lnTo>
+                    <a:pt x="358112" y="208103"/>
+                  </a:lnTo>
+                  <a:lnTo>
+                    <a:pt x="429735" y="247649"/>
+                  </a:lnTo>
+                  <a:lnTo>
+                    <a:pt x="501357" y="286531"/>
+                  </a:lnTo>
+                  <a:lnTo>
+                    <a:pt x="572980" y="324759"/>
+                  </a:lnTo>
+                  <a:lnTo>
+                    <a:pt x="644602" y="362345"/>
+                  </a:lnTo>
+                  <a:lnTo>
+                    <a:pt x="716225" y="399300"/>
+                  </a:lnTo>
+                  <a:lnTo>
+                    <a:pt x="787847" y="435633"/>
+                  </a:lnTo>
+                  <a:lnTo>
+                    <a:pt x="859470" y="471356"/>
+                  </a:lnTo>
+                  <a:lnTo>
+                    <a:pt x="931092" y="506479"/>
+                  </a:lnTo>
+                  <a:lnTo>
+                    <a:pt x="1002715" y="541011"/>
+                  </a:lnTo>
+                  <a:lnTo>
+                    <a:pt x="1074337" y="574963"/>
+                  </a:lnTo>
+                  <a:lnTo>
+                    <a:pt x="1145960" y="608345"/>
+                  </a:lnTo>
+                  <a:lnTo>
+                    <a:pt x="1217582" y="641166"/>
+                  </a:lnTo>
+                  <a:lnTo>
+                    <a:pt x="1289205" y="673435"/>
+                  </a:lnTo>
+                  <a:lnTo>
+                    <a:pt x="1360827" y="705162"/>
+                  </a:lnTo>
+                  <a:lnTo>
+                    <a:pt x="1432450" y="736356"/>
+                  </a:lnTo>
+                  <a:lnTo>
+                    <a:pt x="1504073" y="767026"/>
+                  </a:lnTo>
+                  <a:lnTo>
+                    <a:pt x="1575695" y="797180"/>
+                  </a:lnTo>
+                  <a:lnTo>
+                    <a:pt x="1647318" y="826828"/>
+                  </a:lnTo>
+                  <a:lnTo>
+                    <a:pt x="1718940" y="855977"/>
+                  </a:lnTo>
+                  <a:lnTo>
+                    <a:pt x="1790563" y="884637"/>
+                  </a:lnTo>
+                  <a:lnTo>
+                    <a:pt x="1862185" y="912815"/>
+                  </a:lnTo>
+                  <a:lnTo>
+                    <a:pt x="1933808" y="940519"/>
+                  </a:lnTo>
+                  <a:lnTo>
+                    <a:pt x="2005430" y="967759"/>
+                  </a:lnTo>
+                  <a:lnTo>
+                    <a:pt x="2077053" y="994540"/>
+                  </a:lnTo>
+                  <a:lnTo>
+                    <a:pt x="2148675" y="1020871"/>
+                  </a:lnTo>
+                  <a:lnTo>
+                    <a:pt x="2220298" y="1046760"/>
+                  </a:lnTo>
+                  <a:lnTo>
+                    <a:pt x="2291920" y="1072214"/>
+                  </a:lnTo>
+                  <a:lnTo>
+                    <a:pt x="2363543" y="1097240"/>
+                  </a:lnTo>
+                  <a:lnTo>
+                    <a:pt x="2435165" y="1121846"/>
+                  </a:lnTo>
+                  <a:lnTo>
+                    <a:pt x="2506788" y="1146038"/>
+                  </a:lnTo>
+                  <a:lnTo>
+                    <a:pt x="2578410" y="1169823"/>
+                  </a:lnTo>
+                  <a:lnTo>
+                    <a:pt x="2650033" y="1193209"/>
+                  </a:lnTo>
+                  <a:lnTo>
+                    <a:pt x="2721655" y="1216202"/>
+                  </a:lnTo>
+                  <a:lnTo>
+                    <a:pt x="2793278" y="1238809"/>
+                  </a:lnTo>
+                  <a:lnTo>
+                    <a:pt x="2864901" y="1261036"/>
+                  </a:lnTo>
+                  <a:lnTo>
+                    <a:pt x="2936523" y="1282889"/>
+                  </a:lnTo>
+                  <a:lnTo>
+                    <a:pt x="3008146" y="1304375"/>
+                  </a:lnTo>
+                  <a:lnTo>
+                    <a:pt x="3079768" y="1325500"/>
+                  </a:lnTo>
+                  <a:lnTo>
+                    <a:pt x="3151391" y="1346270"/>
+                  </a:lnTo>
+                  <a:lnTo>
+                    <a:pt x="3223013" y="1366691"/>
+                  </a:lnTo>
+                  <a:lnTo>
+                    <a:pt x="3294636" y="1386769"/>
+                  </a:lnTo>
+                  <a:lnTo>
+                    <a:pt x="3366258" y="1406510"/>
+                  </a:lnTo>
+                  <a:lnTo>
+                    <a:pt x="3437881" y="1425918"/>
+                  </a:lnTo>
+                  <a:lnTo>
+                    <a:pt x="3509503" y="1445001"/>
+                  </a:lnTo>
+                  <a:lnTo>
+                    <a:pt x="3581126" y="1463763"/>
+                  </a:lnTo>
+                  <a:lnTo>
+                    <a:pt x="3652748" y="1482210"/>
+                  </a:lnTo>
+                  <a:lnTo>
+                    <a:pt x="3724371" y="1500346"/>
+                  </a:lnTo>
+                  <a:lnTo>
+                    <a:pt x="3795993" y="1518178"/>
+                  </a:lnTo>
+                  <a:lnTo>
+                    <a:pt x="3867616" y="1535711"/>
+                  </a:lnTo>
+                  <a:lnTo>
+                    <a:pt x="3939238" y="1552949"/>
+                  </a:lnTo>
+                  <a:lnTo>
+                    <a:pt x="4010861" y="1569897"/>
+                  </a:lnTo>
+                  <a:lnTo>
+                    <a:pt x="4082483" y="1586560"/>
+                  </a:lnTo>
+                  <a:lnTo>
+                    <a:pt x="4154106" y="1602943"/>
+                  </a:lnTo>
+                  <a:lnTo>
+                    <a:pt x="4225729" y="1619051"/>
+                  </a:lnTo>
+                  <a:lnTo>
+                    <a:pt x="4297351" y="1634889"/>
+                  </a:lnTo>
+                  <a:lnTo>
+                    <a:pt x="4368974" y="1650460"/>
+                  </a:lnTo>
+                  <a:lnTo>
+                    <a:pt x="4440596" y="1665769"/>
+                  </a:lnTo>
+                  <a:lnTo>
+                    <a:pt x="4512219" y="1680822"/>
+                  </a:lnTo>
+                  <a:lnTo>
+                    <a:pt x="4583841" y="1695621"/>
+                  </a:lnTo>
+                  <a:lnTo>
+                    <a:pt x="4655464" y="1710172"/>
+                  </a:lnTo>
+                  <a:lnTo>
+                    <a:pt x="4727086" y="1724478"/>
+                  </a:lnTo>
+                  <a:lnTo>
+                    <a:pt x="4798709" y="1733249"/>
+                  </a:lnTo>
+                  <a:lnTo>
+                    <a:pt x="4870331" y="1735758"/>
+                  </a:lnTo>
+                  <a:lnTo>
+                    <a:pt x="4941954" y="1738260"/>
+                  </a:lnTo>
+                  <a:lnTo>
+                    <a:pt x="5013576" y="1740754"/>
+                  </a:lnTo>
+                  <a:lnTo>
+                    <a:pt x="5085199" y="1743240"/>
+                  </a:lnTo>
+                  <a:lnTo>
+                    <a:pt x="5156821" y="1745719"/>
+                  </a:lnTo>
+                  <a:lnTo>
+                    <a:pt x="5228444" y="1748191"/>
+                  </a:lnTo>
+                  <a:lnTo>
+                    <a:pt x="5300066" y="1750655"/>
+                  </a:lnTo>
+                  <a:lnTo>
+                    <a:pt x="5371689" y="1753111"/>
+                  </a:lnTo>
+                  <a:lnTo>
+                    <a:pt x="5443311" y="1755560"/>
+                  </a:lnTo>
+                  <a:lnTo>
+                    <a:pt x="5514934" y="1758002"/>
+                  </a:lnTo>
+                  <a:lnTo>
+                    <a:pt x="5586557" y="1760436"/>
+                  </a:lnTo>
+                  <a:lnTo>
+                    <a:pt x="5658179" y="1762863"/>
+                  </a:lnTo>
+                  <a:lnTo>
+                    <a:pt x="5729802" y="1765283"/>
+                  </a:lnTo>
+                  <a:lnTo>
+                    <a:pt x="5801424" y="1767695"/>
+                  </a:lnTo>
+                  <a:lnTo>
+                    <a:pt x="5873047" y="1770100"/>
+                  </a:lnTo>
+                  <a:lnTo>
+                    <a:pt x="5944669" y="1772497"/>
+                  </a:lnTo>
+                  <a:lnTo>
+                    <a:pt x="6016292" y="1774888"/>
+                  </a:lnTo>
+                  <a:lnTo>
+                    <a:pt x="6087914" y="1777271"/>
+                  </a:lnTo>
+                  <a:lnTo>
+                    <a:pt x="6159537" y="1779647"/>
+                  </a:lnTo>
+                  <a:lnTo>
+                    <a:pt x="6231159" y="1782015"/>
+                  </a:lnTo>
+                  <a:lnTo>
+                    <a:pt x="6302782" y="1784377"/>
+                  </a:lnTo>
+                  <a:lnTo>
+                    <a:pt x="6374404" y="1786731"/>
+                  </a:lnTo>
+                  <a:lnTo>
+                    <a:pt x="6446027" y="1789078"/>
+                  </a:lnTo>
+                  <a:lnTo>
+                    <a:pt x="6517649" y="1791419"/>
+                  </a:lnTo>
+                  <a:lnTo>
+                    <a:pt x="6589272" y="1793752"/>
+                  </a:lnTo>
+                  <a:lnTo>
+                    <a:pt x="6660894" y="1796078"/>
+                  </a:lnTo>
+                  <a:lnTo>
+                    <a:pt x="6732517" y="1798397"/>
+                  </a:lnTo>
+                  <a:lnTo>
+                    <a:pt x="6804139" y="1800708"/>
+                  </a:lnTo>
+                  <a:lnTo>
+                    <a:pt x="6875762" y="1803013"/>
+                  </a:lnTo>
+                  <a:lnTo>
+                    <a:pt x="6947385" y="1805311"/>
+                  </a:lnTo>
+                  <a:lnTo>
+                    <a:pt x="7019007" y="1807602"/>
+                  </a:lnTo>
+                  <a:lnTo>
+                    <a:pt x="7090630" y="1809886"/>
                   </a:lnTo>
                 </a:path>
               </a:pathLst>
@@ -4001,309 +4001,309 @@
           </p:nvSpPr>
           <p:spPr>
             <a:xfrm>
-              <a:off x="1172049" y="4553594"/>
-              <a:ext cx="7090630" cy="523538"/>
+              <a:off x="1172049" y="4542236"/>
+              <a:ext cx="7090630" cy="536498"/>
             </a:xfrm>
             <a:custGeom>
               <a:avLst/>
               <a:pathLst>
-                <a:path w="7090630" h="523538">
+                <a:path w="7090630" h="536498">
                   <a:moveTo>
-                    <a:pt x="7090630" y="523538"/>
+                    <a:pt x="7090630" y="536498"/>
                   </a:moveTo>
                   <a:lnTo>
-                    <a:pt x="7019007" y="515383"/>
-                  </a:lnTo>
-                  <a:lnTo>
-                    <a:pt x="6947385" y="507089"/>
-                  </a:lnTo>
-                  <a:lnTo>
-                    <a:pt x="6875762" y="498655"/>
-                  </a:lnTo>
-                  <a:lnTo>
-                    <a:pt x="6804139" y="490077"/>
-                  </a:lnTo>
-                  <a:lnTo>
-                    <a:pt x="6732517" y="481353"/>
-                  </a:lnTo>
-                  <a:lnTo>
-                    <a:pt x="6660894" y="472481"/>
-                  </a:lnTo>
-                  <a:lnTo>
-                    <a:pt x="6589272" y="463459"/>
-                  </a:lnTo>
-                  <a:lnTo>
-                    <a:pt x="6517649" y="454283"/>
-                  </a:lnTo>
-                  <a:lnTo>
-                    <a:pt x="6446027" y="444952"/>
-                  </a:lnTo>
-                  <a:lnTo>
-                    <a:pt x="6374404" y="435461"/>
-                  </a:lnTo>
-                  <a:lnTo>
-                    <a:pt x="6302782" y="425810"/>
-                  </a:lnTo>
-                  <a:lnTo>
-                    <a:pt x="6231159" y="415995"/>
-                  </a:lnTo>
-                  <a:lnTo>
-                    <a:pt x="6159537" y="406013"/>
-                  </a:lnTo>
-                  <a:lnTo>
-                    <a:pt x="6087914" y="395861"/>
-                  </a:lnTo>
-                  <a:lnTo>
-                    <a:pt x="6016292" y="385537"/>
-                  </a:lnTo>
-                  <a:lnTo>
-                    <a:pt x="5944669" y="375038"/>
-                  </a:lnTo>
-                  <a:lnTo>
-                    <a:pt x="5873047" y="364360"/>
-                  </a:lnTo>
-                  <a:lnTo>
-                    <a:pt x="5801424" y="353501"/>
-                  </a:lnTo>
-                  <a:lnTo>
-                    <a:pt x="5729802" y="342458"/>
-                  </a:lnTo>
-                  <a:lnTo>
-                    <a:pt x="5658179" y="331227"/>
-                  </a:lnTo>
-                  <a:lnTo>
-                    <a:pt x="5586557" y="319805"/>
-                  </a:lnTo>
-                  <a:lnTo>
-                    <a:pt x="5514934" y="308189"/>
-                  </a:lnTo>
-                  <a:lnTo>
-                    <a:pt x="5443311" y="296376"/>
-                  </a:lnTo>
-                  <a:lnTo>
-                    <a:pt x="5371689" y="284362"/>
-                  </a:lnTo>
-                  <a:lnTo>
-                    <a:pt x="5300066" y="272144"/>
-                  </a:lnTo>
-                  <a:lnTo>
-                    <a:pt x="5228444" y="259719"/>
-                  </a:lnTo>
-                  <a:lnTo>
-                    <a:pt x="5156821" y="247083"/>
-                  </a:lnTo>
-                  <a:lnTo>
-                    <a:pt x="5085199" y="234232"/>
-                  </a:lnTo>
-                  <a:lnTo>
-                    <a:pt x="5013576" y="221162"/>
-                  </a:lnTo>
-                  <a:lnTo>
-                    <a:pt x="4941954" y="207871"/>
-                  </a:lnTo>
-                  <a:lnTo>
-                    <a:pt x="4870331" y="194354"/>
-                  </a:lnTo>
-                  <a:lnTo>
-                    <a:pt x="4798709" y="180607"/>
-                  </a:lnTo>
-                  <a:lnTo>
-                    <a:pt x="4727086" y="172910"/>
-                  </a:lnTo>
-                  <a:lnTo>
-                    <a:pt x="4655464" y="170526"/>
-                  </a:lnTo>
-                  <a:lnTo>
-                    <a:pt x="4583841" y="168136"/>
-                  </a:lnTo>
-                  <a:lnTo>
-                    <a:pt x="4512219" y="165739"/>
-                  </a:lnTo>
-                  <a:lnTo>
-                    <a:pt x="4440596" y="163335"/>
-                  </a:lnTo>
-                  <a:lnTo>
-                    <a:pt x="4368974" y="160924"/>
-                  </a:lnTo>
-                  <a:lnTo>
-                    <a:pt x="4297351" y="158507"/>
-                  </a:lnTo>
-                  <a:lnTo>
-                    <a:pt x="4225729" y="156082"/>
-                  </a:lnTo>
-                  <a:lnTo>
-                    <a:pt x="4154106" y="153650"/>
-                  </a:lnTo>
-                  <a:lnTo>
-                    <a:pt x="4082483" y="151212"/>
-                  </a:lnTo>
-                  <a:lnTo>
-                    <a:pt x="4010861" y="148766"/>
-                  </a:lnTo>
-                  <a:lnTo>
-                    <a:pt x="3939238" y="146313"/>
-                  </a:lnTo>
-                  <a:lnTo>
-                    <a:pt x="3867616" y="143854"/>
-                  </a:lnTo>
-                  <a:lnTo>
-                    <a:pt x="3795993" y="141387"/>
-                  </a:lnTo>
-                  <a:lnTo>
-                    <a:pt x="3724371" y="138913"/>
-                  </a:lnTo>
-                  <a:lnTo>
-                    <a:pt x="3652748" y="136432"/>
-                  </a:lnTo>
-                  <a:lnTo>
-                    <a:pt x="3581126" y="133944"/>
-                  </a:lnTo>
-                  <a:lnTo>
-                    <a:pt x="3509503" y="131449"/>
-                  </a:lnTo>
-                  <a:lnTo>
-                    <a:pt x="3437881" y="128947"/>
-                  </a:lnTo>
-                  <a:lnTo>
-                    <a:pt x="3366258" y="126437"/>
-                  </a:lnTo>
-                  <a:lnTo>
-                    <a:pt x="3294636" y="123920"/>
-                  </a:lnTo>
-                  <a:lnTo>
-                    <a:pt x="3223013" y="121396"/>
-                  </a:lnTo>
-                  <a:lnTo>
-                    <a:pt x="3151391" y="118865"/>
-                  </a:lnTo>
-                  <a:lnTo>
-                    <a:pt x="3079768" y="116327"/>
-                  </a:lnTo>
-                  <a:lnTo>
-                    <a:pt x="3008146" y="113781"/>
-                  </a:lnTo>
-                  <a:lnTo>
-                    <a:pt x="2936523" y="111228"/>
-                  </a:lnTo>
-                  <a:lnTo>
-                    <a:pt x="2864901" y="108668"/>
-                  </a:lnTo>
-                  <a:lnTo>
-                    <a:pt x="2793278" y="106100"/>
-                  </a:lnTo>
-                  <a:lnTo>
-                    <a:pt x="2721655" y="103525"/>
-                  </a:lnTo>
-                  <a:lnTo>
-                    <a:pt x="2650033" y="100942"/>
-                  </a:lnTo>
-                  <a:lnTo>
-                    <a:pt x="2578410" y="98353"/>
-                  </a:lnTo>
-                  <a:lnTo>
-                    <a:pt x="2506788" y="95755"/>
-                  </a:lnTo>
-                  <a:lnTo>
-                    <a:pt x="2435165" y="93151"/>
-                  </a:lnTo>
-                  <a:lnTo>
-                    <a:pt x="2363543" y="90538"/>
-                  </a:lnTo>
-                  <a:lnTo>
-                    <a:pt x="2291920" y="87919"/>
-                  </a:lnTo>
-                  <a:lnTo>
-                    <a:pt x="2220298" y="85291"/>
-                  </a:lnTo>
-                  <a:lnTo>
-                    <a:pt x="2148675" y="82657"/>
-                  </a:lnTo>
-                  <a:lnTo>
-                    <a:pt x="2077053" y="80014"/>
-                  </a:lnTo>
-                  <a:lnTo>
-                    <a:pt x="2005430" y="77364"/>
-                  </a:lnTo>
-                  <a:lnTo>
-                    <a:pt x="1933808" y="74707"/>
-                  </a:lnTo>
-                  <a:lnTo>
-                    <a:pt x="1862185" y="72042"/>
-                  </a:lnTo>
-                  <a:lnTo>
-                    <a:pt x="1790563" y="69369"/>
-                  </a:lnTo>
-                  <a:lnTo>
-                    <a:pt x="1718940" y="66689"/>
-                  </a:lnTo>
-                  <a:lnTo>
-                    <a:pt x="1647318" y="64001"/>
-                  </a:lnTo>
-                  <a:lnTo>
-                    <a:pt x="1575695" y="61305"/>
-                  </a:lnTo>
-                  <a:lnTo>
-                    <a:pt x="1504073" y="58601"/>
-                  </a:lnTo>
-                  <a:lnTo>
-                    <a:pt x="1432450" y="55890"/>
-                  </a:lnTo>
-                  <a:lnTo>
-                    <a:pt x="1360827" y="53171"/>
-                  </a:lnTo>
-                  <a:lnTo>
-                    <a:pt x="1289205" y="50444"/>
-                  </a:lnTo>
-                  <a:lnTo>
-                    <a:pt x="1217582" y="47709"/>
-                  </a:lnTo>
-                  <a:lnTo>
-                    <a:pt x="1145960" y="44966"/>
-                  </a:lnTo>
-                  <a:lnTo>
-                    <a:pt x="1074337" y="42216"/>
-                  </a:lnTo>
-                  <a:lnTo>
-                    <a:pt x="1002715" y="39458"/>
-                  </a:lnTo>
-                  <a:lnTo>
-                    <a:pt x="931092" y="36691"/>
-                  </a:lnTo>
-                  <a:lnTo>
-                    <a:pt x="859470" y="33917"/>
-                  </a:lnTo>
-                  <a:lnTo>
-                    <a:pt x="787847" y="31135"/>
-                  </a:lnTo>
-                  <a:lnTo>
-                    <a:pt x="716225" y="28345"/>
-                  </a:lnTo>
-                  <a:lnTo>
-                    <a:pt x="644602" y="25547"/>
-                  </a:lnTo>
-                  <a:lnTo>
-                    <a:pt x="572980" y="22741"/>
-                  </a:lnTo>
-                  <a:lnTo>
-                    <a:pt x="501357" y="19926"/>
-                  </a:lnTo>
-                  <a:lnTo>
-                    <a:pt x="429735" y="17104"/>
-                  </a:lnTo>
-                  <a:lnTo>
-                    <a:pt x="358112" y="14274"/>
-                  </a:lnTo>
-                  <a:lnTo>
-                    <a:pt x="286490" y="11435"/>
-                  </a:lnTo>
-                  <a:lnTo>
-                    <a:pt x="214867" y="8589"/>
-                  </a:lnTo>
-                  <a:lnTo>
-                    <a:pt x="143245" y="5734"/>
-                  </a:lnTo>
-                  <a:lnTo>
-                    <a:pt x="71622" y="2871"/>
+                    <a:pt x="7019007" y="528320"/>
+                  </a:lnTo>
+                  <a:lnTo>
+                    <a:pt x="6947385" y="520002"/>
+                  </a:lnTo>
+                  <a:lnTo>
+                    <a:pt x="6875762" y="511542"/>
+                  </a:lnTo>
+                  <a:lnTo>
+                    <a:pt x="6804139" y="502938"/>
+                  </a:lnTo>
+                  <a:lnTo>
+                    <a:pt x="6732517" y="494186"/>
+                  </a:lnTo>
+                  <a:lnTo>
+                    <a:pt x="6660894" y="485285"/>
+                  </a:lnTo>
+                  <a:lnTo>
+                    <a:pt x="6589272" y="476231"/>
+                  </a:lnTo>
+                  <a:lnTo>
+                    <a:pt x="6517649" y="467023"/>
+                  </a:lnTo>
+                  <a:lnTo>
+                    <a:pt x="6446027" y="457658"/>
+                  </a:lnTo>
+                  <a:lnTo>
+                    <a:pt x="6374404" y="448132"/>
+                  </a:lnTo>
+                  <a:lnTo>
+                    <a:pt x="6302782" y="438444"/>
+                  </a:lnTo>
+                  <a:lnTo>
+                    <a:pt x="6231159" y="428590"/>
+                  </a:lnTo>
+                  <a:lnTo>
+                    <a:pt x="6159537" y="418567"/>
+                  </a:lnTo>
+                  <a:lnTo>
+                    <a:pt x="6087914" y="408374"/>
+                  </a:lnTo>
+                  <a:lnTo>
+                    <a:pt x="6016292" y="398006"/>
+                  </a:lnTo>
+                  <a:lnTo>
+                    <a:pt x="5944669" y="387461"/>
+                  </a:lnTo>
+                  <a:lnTo>
+                    <a:pt x="5873047" y="376735"/>
+                  </a:lnTo>
+                  <a:lnTo>
+                    <a:pt x="5801424" y="365827"/>
+                  </a:lnTo>
+                  <a:lnTo>
+                    <a:pt x="5729802" y="354732"/>
+                  </a:lnTo>
+                  <a:lnTo>
+                    <a:pt x="5658179" y="343447"/>
+                  </a:lnTo>
+                  <a:lnTo>
+                    <a:pt x="5586557" y="331969"/>
+                  </a:lnTo>
+                  <a:lnTo>
+                    <a:pt x="5514934" y="320296"/>
+                  </a:lnTo>
+                  <a:lnTo>
+                    <a:pt x="5443311" y="308423"/>
+                  </a:lnTo>
+                  <a:lnTo>
+                    <a:pt x="5371689" y="296346"/>
+                  </a:lnTo>
+                  <a:lnTo>
+                    <a:pt x="5300066" y="284064"/>
+                  </a:lnTo>
+                  <a:lnTo>
+                    <a:pt x="5228444" y="271572"/>
+                  </a:lnTo>
+                  <a:lnTo>
+                    <a:pt x="5156821" y="258866"/>
+                  </a:lnTo>
+                  <a:lnTo>
+                    <a:pt x="5085199" y="245943"/>
+                  </a:lnTo>
+                  <a:lnTo>
+                    <a:pt x="5013576" y="232799"/>
+                  </a:lnTo>
+                  <a:lnTo>
+                    <a:pt x="4941954" y="219430"/>
+                  </a:lnTo>
+                  <a:lnTo>
+                    <a:pt x="4870331" y="205833"/>
+                  </a:lnTo>
+                  <a:lnTo>
+                    <a:pt x="4798709" y="192003"/>
+                  </a:lnTo>
+                  <a:lnTo>
+                    <a:pt x="4727086" y="184192"/>
+                  </a:lnTo>
+                  <a:lnTo>
+                    <a:pt x="4655464" y="181667"/>
+                  </a:lnTo>
+                  <a:lnTo>
+                    <a:pt x="4583841" y="179135"/>
+                  </a:lnTo>
+                  <a:lnTo>
+                    <a:pt x="4512219" y="176595"/>
+                  </a:lnTo>
+                  <a:lnTo>
+                    <a:pt x="4440596" y="174047"/>
+                  </a:lnTo>
+                  <a:lnTo>
+                    <a:pt x="4368974" y="171492"/>
+                  </a:lnTo>
+                  <a:lnTo>
+                    <a:pt x="4297351" y="168929"/>
+                  </a:lnTo>
+                  <a:lnTo>
+                    <a:pt x="4225729" y="166358"/>
+                  </a:lnTo>
+                  <a:lnTo>
+                    <a:pt x="4154106" y="163779"/>
+                  </a:lnTo>
+                  <a:lnTo>
+                    <a:pt x="4082483" y="161193"/>
+                  </a:lnTo>
+                  <a:lnTo>
+                    <a:pt x="4010861" y="158598"/>
+                  </a:lnTo>
+                  <a:lnTo>
+                    <a:pt x="3939238" y="155996"/>
+                  </a:lnTo>
+                  <a:lnTo>
+                    <a:pt x="3867616" y="153386"/>
+                  </a:lnTo>
+                  <a:lnTo>
+                    <a:pt x="3795993" y="150768"/>
+                  </a:lnTo>
+                  <a:lnTo>
+                    <a:pt x="3724371" y="148142"/>
+                  </a:lnTo>
+                  <a:lnTo>
+                    <a:pt x="3652748" y="145508"/>
+                  </a:lnTo>
+                  <a:lnTo>
+                    <a:pt x="3581126" y="142866"/>
+                  </a:lnTo>
+                  <a:lnTo>
+                    <a:pt x="3509503" y="140216"/>
+                  </a:lnTo>
+                  <a:lnTo>
+                    <a:pt x="3437881" y="137557"/>
+                  </a:lnTo>
+                  <a:lnTo>
+                    <a:pt x="3366258" y="134891"/>
+                  </a:lnTo>
+                  <a:lnTo>
+                    <a:pt x="3294636" y="132217"/>
+                  </a:lnTo>
+                  <a:lnTo>
+                    <a:pt x="3223013" y="129534"/>
+                  </a:lnTo>
+                  <a:lnTo>
+                    <a:pt x="3151391" y="126844"/>
+                  </a:lnTo>
+                  <a:lnTo>
+                    <a:pt x="3079768" y="124145"/>
+                  </a:lnTo>
+                  <a:lnTo>
+                    <a:pt x="3008146" y="121438"/>
+                  </a:lnTo>
+                  <a:lnTo>
+                    <a:pt x="2936523" y="118723"/>
+                  </a:lnTo>
+                  <a:lnTo>
+                    <a:pt x="2864901" y="115999"/>
+                  </a:lnTo>
+                  <a:lnTo>
+                    <a:pt x="2793278" y="113268"/>
+                  </a:lnTo>
+                  <a:lnTo>
+                    <a:pt x="2721655" y="110528"/>
+                  </a:lnTo>
+                  <a:lnTo>
+                    <a:pt x="2650033" y="107779"/>
+                  </a:lnTo>
+                  <a:lnTo>
+                    <a:pt x="2578410" y="105023"/>
+                  </a:lnTo>
+                  <a:lnTo>
+                    <a:pt x="2506788" y="102257"/>
+                  </a:lnTo>
+                  <a:lnTo>
+                    <a:pt x="2435165" y="99484"/>
+                  </a:lnTo>
+                  <a:lnTo>
+                    <a:pt x="2363543" y="96702"/>
+                  </a:lnTo>
+                  <a:lnTo>
+                    <a:pt x="2291920" y="93912"/>
+                  </a:lnTo>
+                  <a:lnTo>
+                    <a:pt x="2220298" y="91113"/>
+                  </a:lnTo>
+                  <a:lnTo>
+                    <a:pt x="2148675" y="88306"/>
+                  </a:lnTo>
+                  <a:lnTo>
+                    <a:pt x="2077053" y="85490"/>
+                  </a:lnTo>
+                  <a:lnTo>
+                    <a:pt x="2005430" y="82665"/>
+                  </a:lnTo>
+                  <a:lnTo>
+                    <a:pt x="1933808" y="79832"/>
+                  </a:lnTo>
+                  <a:lnTo>
+                    <a:pt x="1862185" y="76991"/>
+                  </a:lnTo>
+                  <a:lnTo>
+                    <a:pt x="1790563" y="74140"/>
+                  </a:lnTo>
+                  <a:lnTo>
+                    <a:pt x="1718940" y="71281"/>
+                  </a:lnTo>
+                  <a:lnTo>
+                    <a:pt x="1647318" y="68414"/>
+                  </a:lnTo>
+                  <a:lnTo>
+                    <a:pt x="1575695" y="65537"/>
+                  </a:lnTo>
+                  <a:lnTo>
+                    <a:pt x="1504073" y="62652"/>
+                  </a:lnTo>
+                  <a:lnTo>
+                    <a:pt x="1432450" y="59759"/>
+                  </a:lnTo>
+                  <a:lnTo>
+                    <a:pt x="1360827" y="56856"/>
+                  </a:lnTo>
+                  <a:lnTo>
+                    <a:pt x="1289205" y="53945"/>
+                  </a:lnTo>
+                  <a:lnTo>
+                    <a:pt x="1217582" y="51024"/>
+                  </a:lnTo>
+                  <a:lnTo>
+                    <a:pt x="1145960" y="48095"/>
+                  </a:lnTo>
+                  <a:lnTo>
+                    <a:pt x="1074337" y="45157"/>
+                  </a:lnTo>
+                  <a:lnTo>
+                    <a:pt x="1002715" y="42210"/>
+                  </a:lnTo>
+                  <a:lnTo>
+                    <a:pt x="931092" y="39254"/>
+                  </a:lnTo>
+                  <a:lnTo>
+                    <a:pt x="859470" y="36289"/>
+                  </a:lnTo>
+                  <a:lnTo>
+                    <a:pt x="787847" y="33315"/>
+                  </a:lnTo>
+                  <a:lnTo>
+                    <a:pt x="716225" y="30332"/>
+                  </a:lnTo>
+                  <a:lnTo>
+                    <a:pt x="644602" y="27340"/>
+                  </a:lnTo>
+                  <a:lnTo>
+                    <a:pt x="572980" y="24339"/>
+                  </a:lnTo>
+                  <a:lnTo>
+                    <a:pt x="501357" y="21329"/>
+                  </a:lnTo>
+                  <a:lnTo>
+                    <a:pt x="429735" y="18309"/>
+                  </a:lnTo>
+                  <a:lnTo>
+                    <a:pt x="358112" y="15281"/>
+                  </a:lnTo>
+                  <a:lnTo>
+                    <a:pt x="286490" y="12243"/>
+                  </a:lnTo>
+                  <a:lnTo>
+                    <a:pt x="214867" y="9196"/>
+                  </a:lnTo>
+                  <a:lnTo>
+                    <a:pt x="143245" y="6140"/>
+                  </a:lnTo>
+                  <a:lnTo>
+                    <a:pt x="71622" y="3074"/>
                   </a:lnTo>
                   <a:lnTo>
                     <a:pt x="0" y="0"/>
@@ -4326,312 +4326,312 @@
           </p:nvSpPr>
           <p:spPr>
             <a:xfrm>
-              <a:off x="1172049" y="3959327"/>
-              <a:ext cx="7090630" cy="995531"/>
+              <a:off x="1172049" y="3944795"/>
+              <a:ext cx="7090630" cy="1012718"/>
             </a:xfrm>
             <a:custGeom>
               <a:avLst/>
               <a:pathLst>
-                <a:path w="7090630" h="995531">
+                <a:path w="7090630" h="1012718">
                   <a:moveTo>
                     <a:pt x="0" y="0"/>
                   </a:moveTo>
                   <a:lnTo>
-                    <a:pt x="71622" y="15668"/>
-                  </a:lnTo>
-                  <a:lnTo>
-                    <a:pt x="143245" y="31183"/>
-                  </a:lnTo>
-                  <a:lnTo>
-                    <a:pt x="214867" y="46546"/>
-                  </a:lnTo>
-                  <a:lnTo>
-                    <a:pt x="286490" y="61759"/>
-                  </a:lnTo>
-                  <a:lnTo>
-                    <a:pt x="358112" y="76822"/>
-                  </a:lnTo>
-                  <a:lnTo>
-                    <a:pt x="429735" y="91737"/>
-                  </a:lnTo>
-                  <a:lnTo>
-                    <a:pt x="501357" y="106506"/>
-                  </a:lnTo>
-                  <a:lnTo>
-                    <a:pt x="572980" y="121131"/>
-                  </a:lnTo>
-                  <a:lnTo>
-                    <a:pt x="644602" y="135612"/>
-                  </a:lnTo>
-                  <a:lnTo>
-                    <a:pt x="716225" y="149951"/>
-                  </a:lnTo>
-                  <a:lnTo>
-                    <a:pt x="787847" y="164149"/>
-                  </a:lnTo>
-                  <a:lnTo>
-                    <a:pt x="859470" y="178208"/>
-                  </a:lnTo>
-                  <a:lnTo>
-                    <a:pt x="931092" y="192129"/>
-                  </a:lnTo>
-                  <a:lnTo>
-                    <a:pt x="1002715" y="205914"/>
-                  </a:lnTo>
-                  <a:lnTo>
-                    <a:pt x="1074337" y="219564"/>
-                  </a:lnTo>
-                  <a:lnTo>
-                    <a:pt x="1145960" y="233079"/>
-                  </a:lnTo>
-                  <a:lnTo>
-                    <a:pt x="1217582" y="246463"/>
-                  </a:lnTo>
-                  <a:lnTo>
-                    <a:pt x="1289205" y="259715"/>
-                  </a:lnTo>
-                  <a:lnTo>
-                    <a:pt x="1360827" y="272837"/>
-                  </a:lnTo>
-                  <a:lnTo>
-                    <a:pt x="1432450" y="285830"/>
-                  </a:lnTo>
-                  <a:lnTo>
-                    <a:pt x="1504073" y="298696"/>
-                  </a:lnTo>
-                  <a:lnTo>
-                    <a:pt x="1575695" y="311436"/>
-                  </a:lnTo>
-                  <a:lnTo>
-                    <a:pt x="1647318" y="324051"/>
-                  </a:lnTo>
-                  <a:lnTo>
-                    <a:pt x="1718940" y="336542"/>
-                  </a:lnTo>
-                  <a:lnTo>
-                    <a:pt x="1790563" y="348911"/>
-                  </a:lnTo>
-                  <a:lnTo>
-                    <a:pt x="1862185" y="361158"/>
-                  </a:lnTo>
-                  <a:lnTo>
-                    <a:pt x="1933808" y="373285"/>
-                  </a:lnTo>
-                  <a:lnTo>
-                    <a:pt x="2005430" y="385294"/>
-                  </a:lnTo>
-                  <a:lnTo>
-                    <a:pt x="2077053" y="397184"/>
-                  </a:lnTo>
-                  <a:lnTo>
-                    <a:pt x="2148675" y="408958"/>
-                  </a:lnTo>
-                  <a:lnTo>
-                    <a:pt x="2220298" y="420617"/>
-                  </a:lnTo>
-                  <a:lnTo>
-                    <a:pt x="2291920" y="432161"/>
-                  </a:lnTo>
-                  <a:lnTo>
-                    <a:pt x="2363543" y="443592"/>
-                  </a:lnTo>
-                  <a:lnTo>
-                    <a:pt x="2435165" y="454911"/>
-                  </a:lnTo>
-                  <a:lnTo>
-                    <a:pt x="2506788" y="466119"/>
-                  </a:lnTo>
-                  <a:lnTo>
-                    <a:pt x="2578410" y="477217"/>
-                  </a:lnTo>
-                  <a:lnTo>
-                    <a:pt x="2650033" y="488207"/>
-                  </a:lnTo>
-                  <a:lnTo>
-                    <a:pt x="2721655" y="499088"/>
-                  </a:lnTo>
-                  <a:lnTo>
-                    <a:pt x="2793278" y="509863"/>
-                  </a:lnTo>
-                  <a:lnTo>
-                    <a:pt x="2864901" y="520532"/>
-                  </a:lnTo>
-                  <a:lnTo>
-                    <a:pt x="2936523" y="531097"/>
-                  </a:lnTo>
-                  <a:lnTo>
-                    <a:pt x="3008146" y="541558"/>
-                  </a:lnTo>
-                  <a:lnTo>
-                    <a:pt x="3079768" y="551916"/>
-                  </a:lnTo>
-                  <a:lnTo>
-                    <a:pt x="3151391" y="562173"/>
-                  </a:lnTo>
-                  <a:lnTo>
-                    <a:pt x="3223013" y="572329"/>
-                  </a:lnTo>
-                  <a:lnTo>
-                    <a:pt x="3294636" y="582386"/>
-                  </a:lnTo>
-                  <a:lnTo>
-                    <a:pt x="3366258" y="592344"/>
-                  </a:lnTo>
-                  <a:lnTo>
-                    <a:pt x="3437881" y="602204"/>
-                  </a:lnTo>
-                  <a:lnTo>
-                    <a:pt x="3509503" y="611968"/>
-                  </a:lnTo>
-                  <a:lnTo>
-                    <a:pt x="3581126" y="621636"/>
-                  </a:lnTo>
-                  <a:lnTo>
-                    <a:pt x="3652748" y="631209"/>
-                  </a:lnTo>
-                  <a:lnTo>
-                    <a:pt x="3724371" y="640688"/>
-                  </a:lnTo>
-                  <a:lnTo>
-                    <a:pt x="3795993" y="650075"/>
-                  </a:lnTo>
-                  <a:lnTo>
-                    <a:pt x="3867616" y="659369"/>
-                  </a:lnTo>
-                  <a:lnTo>
-                    <a:pt x="3939238" y="668572"/>
-                  </a:lnTo>
-                  <a:lnTo>
-                    <a:pt x="4010861" y="677685"/>
-                  </a:lnTo>
-                  <a:lnTo>
-                    <a:pt x="4082483" y="686708"/>
-                  </a:lnTo>
-                  <a:lnTo>
-                    <a:pt x="4154106" y="695644"/>
-                  </a:lnTo>
-                  <a:lnTo>
-                    <a:pt x="4225729" y="704491"/>
-                  </a:lnTo>
-                  <a:lnTo>
-                    <a:pt x="4297351" y="713252"/>
-                  </a:lnTo>
-                  <a:lnTo>
-                    <a:pt x="4368974" y="721927"/>
-                  </a:lnTo>
-                  <a:lnTo>
-                    <a:pt x="4440596" y="730516"/>
-                  </a:lnTo>
-                  <a:lnTo>
-                    <a:pt x="4512219" y="739022"/>
-                  </a:lnTo>
-                  <a:lnTo>
-                    <a:pt x="4583841" y="747444"/>
-                  </a:lnTo>
-                  <a:lnTo>
-                    <a:pt x="4655464" y="755783"/>
-                  </a:lnTo>
-                  <a:lnTo>
-                    <a:pt x="4727086" y="764041"/>
-                  </a:lnTo>
-                  <a:lnTo>
-                    <a:pt x="4798709" y="772218"/>
-                  </a:lnTo>
-                  <a:lnTo>
-                    <a:pt x="4870331" y="780315"/>
-                  </a:lnTo>
-                  <a:lnTo>
-                    <a:pt x="4941954" y="788332"/>
-                  </a:lnTo>
-                  <a:lnTo>
-                    <a:pt x="5013576" y="796270"/>
-                  </a:lnTo>
-                  <a:lnTo>
-                    <a:pt x="5085199" y="804131"/>
-                  </a:lnTo>
-                  <a:lnTo>
-                    <a:pt x="5156821" y="811915"/>
-                  </a:lnTo>
-                  <a:lnTo>
-                    <a:pt x="5228444" y="819622"/>
-                  </a:lnTo>
-                  <a:lnTo>
-                    <a:pt x="5300066" y="827254"/>
-                  </a:lnTo>
-                  <a:lnTo>
-                    <a:pt x="5371689" y="834811"/>
-                  </a:lnTo>
-                  <a:lnTo>
-                    <a:pt x="5443311" y="842294"/>
-                  </a:lnTo>
-                  <a:lnTo>
-                    <a:pt x="5514934" y="849703"/>
-                  </a:lnTo>
-                  <a:lnTo>
-                    <a:pt x="5586557" y="857040"/>
-                  </a:lnTo>
-                  <a:lnTo>
-                    <a:pt x="5658179" y="864305"/>
-                  </a:lnTo>
-                  <a:lnTo>
-                    <a:pt x="5729802" y="871498"/>
-                  </a:lnTo>
-                  <a:lnTo>
-                    <a:pt x="5801424" y="878621"/>
-                  </a:lnTo>
-                  <a:lnTo>
-                    <a:pt x="5873047" y="885675"/>
-                  </a:lnTo>
-                  <a:lnTo>
-                    <a:pt x="5944669" y="892659"/>
-                  </a:lnTo>
-                  <a:lnTo>
-                    <a:pt x="6016292" y="899574"/>
-                  </a:lnTo>
-                  <a:lnTo>
-                    <a:pt x="6087914" y="906422"/>
-                  </a:lnTo>
-                  <a:lnTo>
-                    <a:pt x="6159537" y="913203"/>
-                  </a:lnTo>
-                  <a:lnTo>
-                    <a:pt x="6231159" y="919917"/>
-                  </a:lnTo>
-                  <a:lnTo>
-                    <a:pt x="6302782" y="926565"/>
-                  </a:lnTo>
-                  <a:lnTo>
-                    <a:pt x="6374404" y="933148"/>
-                  </a:lnTo>
-                  <a:lnTo>
-                    <a:pt x="6446027" y="939667"/>
-                  </a:lnTo>
-                  <a:lnTo>
-                    <a:pt x="6517649" y="946121"/>
-                  </a:lnTo>
-                  <a:lnTo>
-                    <a:pt x="6589272" y="952513"/>
-                  </a:lnTo>
-                  <a:lnTo>
-                    <a:pt x="6660894" y="958841"/>
-                  </a:lnTo>
-                  <a:lnTo>
-                    <a:pt x="6732517" y="965108"/>
-                  </a:lnTo>
-                  <a:lnTo>
-                    <a:pt x="6804139" y="971313"/>
-                  </a:lnTo>
-                  <a:lnTo>
-                    <a:pt x="6875762" y="977458"/>
-                  </a:lnTo>
-                  <a:lnTo>
-                    <a:pt x="6947385" y="983542"/>
-                  </a:lnTo>
-                  <a:lnTo>
-                    <a:pt x="7019007" y="989566"/>
-                  </a:lnTo>
-                  <a:lnTo>
-                    <a:pt x="7090630" y="995531"/>
+                    <a:pt x="71622" y="16028"/>
+                  </a:lnTo>
+                  <a:lnTo>
+                    <a:pt x="143245" y="31897"/>
+                  </a:lnTo>
+                  <a:lnTo>
+                    <a:pt x="214867" y="47608"/>
+                  </a:lnTo>
+                  <a:lnTo>
+                    <a:pt x="286490" y="63164"/>
+                  </a:lnTo>
+                  <a:lnTo>
+                    <a:pt x="358112" y="78564"/>
+                  </a:lnTo>
+                  <a:lnTo>
+                    <a:pt x="429735" y="93812"/>
+                  </a:lnTo>
+                  <a:lnTo>
+                    <a:pt x="501357" y="108908"/>
+                  </a:lnTo>
+                  <a:lnTo>
+                    <a:pt x="572980" y="123853"/>
+                  </a:lnTo>
+                  <a:lnTo>
+                    <a:pt x="644602" y="138651"/>
+                  </a:lnTo>
+                  <a:lnTo>
+                    <a:pt x="716225" y="153301"/>
+                  </a:lnTo>
+                  <a:lnTo>
+                    <a:pt x="787847" y="167806"/>
+                  </a:lnTo>
+                  <a:lnTo>
+                    <a:pt x="859470" y="182166"/>
+                  </a:lnTo>
+                  <a:lnTo>
+                    <a:pt x="931092" y="196384"/>
+                  </a:lnTo>
+                  <a:lnTo>
+                    <a:pt x="1002715" y="210460"/>
+                  </a:lnTo>
+                  <a:lnTo>
+                    <a:pt x="1074337" y="224396"/>
+                  </a:lnTo>
+                  <a:lnTo>
+                    <a:pt x="1145960" y="238194"/>
+                  </a:lnTo>
+                  <a:lnTo>
+                    <a:pt x="1217582" y="251855"/>
+                  </a:lnTo>
+                  <a:lnTo>
+                    <a:pt x="1289205" y="265380"/>
+                  </a:lnTo>
+                  <a:lnTo>
+                    <a:pt x="1360827" y="278770"/>
+                  </a:lnTo>
+                  <a:lnTo>
+                    <a:pt x="1432450" y="292028"/>
+                  </a:lnTo>
+                  <a:lnTo>
+                    <a:pt x="1504073" y="305153"/>
+                  </a:lnTo>
+                  <a:lnTo>
+                    <a:pt x="1575695" y="318148"/>
+                  </a:lnTo>
+                  <a:lnTo>
+                    <a:pt x="1647318" y="331014"/>
+                  </a:lnTo>
+                  <a:lnTo>
+                    <a:pt x="1718940" y="343752"/>
+                  </a:lnTo>
+                  <a:lnTo>
+                    <a:pt x="1790563" y="356364"/>
+                  </a:lnTo>
+                  <a:lnTo>
+                    <a:pt x="1862185" y="368850"/>
+                  </a:lnTo>
+                  <a:lnTo>
+                    <a:pt x="1933808" y="381212"/>
+                  </a:lnTo>
+                  <a:lnTo>
+                    <a:pt x="2005430" y="393451"/>
+                  </a:lnTo>
+                  <a:lnTo>
+                    <a:pt x="2077053" y="405568"/>
+                  </a:lnTo>
+                  <a:lnTo>
+                    <a:pt x="2148675" y="417565"/>
+                  </a:lnTo>
+                  <a:lnTo>
+                    <a:pt x="2220298" y="429443"/>
+                  </a:lnTo>
+                  <a:lnTo>
+                    <a:pt x="2291920" y="441202"/>
+                  </a:lnTo>
+                  <a:lnTo>
+                    <a:pt x="2363543" y="452845"/>
+                  </a:lnTo>
+                  <a:lnTo>
+                    <a:pt x="2435165" y="464372"/>
+                  </a:lnTo>
+                  <a:lnTo>
+                    <a:pt x="2506788" y="475784"/>
+                  </a:lnTo>
+                  <a:lnTo>
+                    <a:pt x="2578410" y="487083"/>
+                  </a:lnTo>
+                  <a:lnTo>
+                    <a:pt x="2650033" y="498270"/>
+                  </a:lnTo>
+                  <a:lnTo>
+                    <a:pt x="2721655" y="509345"/>
+                  </a:lnTo>
+                  <a:lnTo>
+                    <a:pt x="2793278" y="520311"/>
+                  </a:lnTo>
+                  <a:lnTo>
+                    <a:pt x="2864901" y="531167"/>
+                  </a:lnTo>
+                  <a:lnTo>
+                    <a:pt x="2936523" y="541915"/>
+                  </a:lnTo>
+                  <a:lnTo>
+                    <a:pt x="3008146" y="552557"/>
+                  </a:lnTo>
+                  <a:lnTo>
+                    <a:pt x="3079768" y="563093"/>
+                  </a:lnTo>
+                  <a:lnTo>
+                    <a:pt x="3151391" y="573524"/>
+                  </a:lnTo>
+                  <a:lnTo>
+                    <a:pt x="3223013" y="583851"/>
+                  </a:lnTo>
+                  <a:lnTo>
+                    <a:pt x="3294636" y="594076"/>
+                  </a:lnTo>
+                  <a:lnTo>
+                    <a:pt x="3366258" y="604199"/>
+                  </a:lnTo>
+                  <a:lnTo>
+                    <a:pt x="3437881" y="614222"/>
+                  </a:lnTo>
+                  <a:lnTo>
+                    <a:pt x="3509503" y="624144"/>
+                  </a:lnTo>
+                  <a:lnTo>
+                    <a:pt x="3581126" y="633969"/>
+                  </a:lnTo>
+                  <a:lnTo>
+                    <a:pt x="3652748" y="643695"/>
+                  </a:lnTo>
+                  <a:lnTo>
+                    <a:pt x="3724371" y="653325"/>
+                  </a:lnTo>
+                  <a:lnTo>
+                    <a:pt x="3795993" y="662859"/>
+                  </a:lnTo>
+                  <a:lnTo>
+                    <a:pt x="3867616" y="672298"/>
+                  </a:lnTo>
+                  <a:lnTo>
+                    <a:pt x="3939238" y="681644"/>
+                  </a:lnTo>
+                  <a:lnTo>
+                    <a:pt x="4010861" y="690897"/>
+                  </a:lnTo>
+                  <a:lnTo>
+                    <a:pt x="4082483" y="700057"/>
+                  </a:lnTo>
+                  <a:lnTo>
+                    <a:pt x="4154106" y="709127"/>
+                  </a:lnTo>
+                  <a:lnTo>
+                    <a:pt x="4225729" y="718106"/>
+                  </a:lnTo>
+                  <a:lnTo>
+                    <a:pt x="4297351" y="726996"/>
+                  </a:lnTo>
+                  <a:lnTo>
+                    <a:pt x="4368974" y="735798"/>
+                  </a:lnTo>
+                  <a:lnTo>
+                    <a:pt x="4440596" y="744513"/>
+                  </a:lnTo>
+                  <a:lnTo>
+                    <a:pt x="4512219" y="753140"/>
+                  </a:lnTo>
+                  <a:lnTo>
+                    <a:pt x="4583841" y="761682"/>
+                  </a:lnTo>
+                  <a:lnTo>
+                    <a:pt x="4655464" y="770139"/>
+                  </a:lnTo>
+                  <a:lnTo>
+                    <a:pt x="4727086" y="778512"/>
+                  </a:lnTo>
+                  <a:lnTo>
+                    <a:pt x="4798709" y="786802"/>
+                  </a:lnTo>
+                  <a:lnTo>
+                    <a:pt x="4870331" y="795009"/>
+                  </a:lnTo>
+                  <a:lnTo>
+                    <a:pt x="4941954" y="803135"/>
+                  </a:lnTo>
+                  <a:lnTo>
+                    <a:pt x="5013576" y="811180"/>
+                  </a:lnTo>
+                  <a:lnTo>
+                    <a:pt x="5085199" y="819145"/>
+                  </a:lnTo>
+                  <a:lnTo>
+                    <a:pt x="5156821" y="827031"/>
+                  </a:lnTo>
+                  <a:lnTo>
+                    <a:pt x="5228444" y="834838"/>
+                  </a:lnTo>
+                  <a:lnTo>
+                    <a:pt x="5300066" y="842568"/>
+                  </a:lnTo>
+                  <a:lnTo>
+                    <a:pt x="5371689" y="850221"/>
+                  </a:lnTo>
+                  <a:lnTo>
+                    <a:pt x="5443311" y="857798"/>
+                  </a:lnTo>
+                  <a:lnTo>
+                    <a:pt x="5514934" y="865299"/>
+                  </a:lnTo>
+                  <a:lnTo>
+                    <a:pt x="5586557" y="872726"/>
+                  </a:lnTo>
+                  <a:lnTo>
+                    <a:pt x="5658179" y="880080"/>
+                  </a:lnTo>
+                  <a:lnTo>
+                    <a:pt x="5729802" y="887360"/>
+                  </a:lnTo>
+                  <a:lnTo>
+                    <a:pt x="5801424" y="894567"/>
+                  </a:lnTo>
+                  <a:lnTo>
+                    <a:pt x="5873047" y="901704"/>
+                  </a:lnTo>
+                  <a:lnTo>
+                    <a:pt x="5944669" y="908769"/>
+                  </a:lnTo>
+                  <a:lnTo>
+                    <a:pt x="6016292" y="915764"/>
+                  </a:lnTo>
+                  <a:lnTo>
+                    <a:pt x="6087914" y="922689"/>
+                  </a:lnTo>
+                  <a:lnTo>
+                    <a:pt x="6159537" y="929546"/>
+                  </a:lnTo>
+                  <a:lnTo>
+                    <a:pt x="6231159" y="936334"/>
+                  </a:lnTo>
+                  <a:lnTo>
+                    <a:pt x="6302782" y="943055"/>
+                  </a:lnTo>
+                  <a:lnTo>
+                    <a:pt x="6374404" y="949709"/>
+                  </a:lnTo>
+                  <a:lnTo>
+                    <a:pt x="6446027" y="956297"/>
+                  </a:lnTo>
+                  <a:lnTo>
+                    <a:pt x="6517649" y="962819"/>
+                  </a:lnTo>
+                  <a:lnTo>
+                    <a:pt x="6589272" y="969277"/>
+                  </a:lnTo>
+                  <a:lnTo>
+                    <a:pt x="6660894" y="975670"/>
+                  </a:lnTo>
+                  <a:lnTo>
+                    <a:pt x="6732517" y="982000"/>
+                  </a:lnTo>
+                  <a:lnTo>
+                    <a:pt x="6804139" y="988267"/>
+                  </a:lnTo>
+                  <a:lnTo>
+                    <a:pt x="6875762" y="994472"/>
+                  </a:lnTo>
+                  <a:lnTo>
+                    <a:pt x="6947385" y="1000615"/>
+                  </a:lnTo>
+                  <a:lnTo>
+                    <a:pt x="7019007" y="1006697"/>
+                  </a:lnTo>
+                  <a:lnTo>
+                    <a:pt x="7090630" y="1012718"/>
                   </a:lnTo>
                 </a:path>
               </a:pathLst>
@@ -5371,7 +5371,7 @@
                   <a:latin typeface="Helvetica"/>
                   <a:cs typeface="Helvetica"/>
                 </a:rPr>
-                <a:t>subHR per 10 mL/min decline: 1.13 (1.04-1.23), p_Bonf = 0.034 (n = 6)  |  per IQR decline (Δ = 23.3): 1.32 (1.08-1.61)  |  IQR: [-12.8, 10.5]</a:t>
+                <a:t>subHR per 10 mL/min decline: 1.13 (1.04-1.23), p_Bonf = 0.029 (n = 6)  |  per IQR decline (Δ = 23.3): 1.33 (1.09-1.61)  |  IQR: [-12.8, 10.5]</a:t>
               </a:r>
             </a:p>
           </p:txBody>
